--- a/Presentation/AMIRIS_Comprehensive_Progress_Report_2026-09-07.pptx
+++ b/Presentation/AMIRIS_Comprehensive_Progress_Report_2026-09-07.pptx
@@ -4023,7 +4023,7 @@
           <a:noFill/>
         </p:spPr>
         <p:txBody>
-          <a:bodyPr wrap="none">
+          <a:bodyPr wrap="square">
             <a:spAutoFit/>
           </a:bodyPr>
           <a:lstStyle/>
@@ -4603,7 +4603,7 @@
           <a:noFill/>
         </p:spPr>
         <p:txBody>
-          <a:bodyPr wrap="none">
+          <a:bodyPr wrap="square">
             <a:spAutoFit/>
           </a:bodyPr>
           <a:lstStyle/>
@@ -4774,7 +4774,7 @@
           <a:noFill/>
         </p:spPr>
         <p:txBody>
-          <a:bodyPr wrap="none">
+          <a:bodyPr wrap="square">
             <a:spAutoFit/>
           </a:bodyPr>
           <a:lstStyle/>
@@ -5600,7 +5600,7 @@
           <a:noFill/>
         </p:spPr>
         <p:txBody>
-          <a:bodyPr wrap="none">
+          <a:bodyPr wrap="square">
             <a:spAutoFit/>
           </a:bodyPr>
           <a:lstStyle/>
@@ -6952,7 +6952,7 @@
           <a:noFill/>
         </p:spPr>
         <p:txBody>
-          <a:bodyPr wrap="none">
+          <a:bodyPr wrap="square">
             <a:spAutoFit/>
           </a:bodyPr>
           <a:lstStyle/>
@@ -7097,7 +7097,7 @@
         </p:nvGraphicFramePr>
         <p:xfrm>
           <a:off x="640080" y="1371600"/>
-          <a:ext cx="12984480" cy="2514600"/>
+          <a:ext cx="10881357" cy="2514600"/>
         </p:xfrm>
         <a:graphic>
           <a:graphicData uri="http://schemas.openxmlformats.org/drawingml/2006/table">
@@ -7106,10 +7106,10 @@
                 <a:tableStyleId>{5C22544A-7EE6-4342-B048-85BDC9FD1C3A}</a:tableStyleId>
               </a:tblPr>
               <a:tblGrid>
-                <a:gridCol w="4754880"/>
-                <a:gridCol w="2743200"/>
-                <a:gridCol w="2743200"/>
-                <a:gridCol w="2743200"/>
+                <a:gridCol w="3984723"/>
+                <a:gridCol w="2298878"/>
+                <a:gridCol w="2298878"/>
+                <a:gridCol w="2298878"/>
               </a:tblGrid>
               <a:tr h="502920">
                 <a:tc>
@@ -7599,7 +7599,7 @@
           <a:noFill/>
         </p:spPr>
         <p:txBody>
-          <a:bodyPr wrap="none">
+          <a:bodyPr wrap="square">
             <a:spAutoFit/>
           </a:bodyPr>
           <a:lstStyle/>
@@ -9236,7 +9236,7 @@
           <a:noFill/>
         </p:spPr>
         <p:txBody>
-          <a:bodyPr wrap="none">
+          <a:bodyPr wrap="square">
             <a:spAutoFit/>
           </a:bodyPr>
           <a:lstStyle/>
@@ -9984,7 +9984,7 @@
         </p:nvGraphicFramePr>
         <p:xfrm>
           <a:off x="640080" y="1371600"/>
-          <a:ext cx="11338560" cy="1508760"/>
+          <a:ext cx="10881359" cy="1508760"/>
         </p:xfrm>
         <a:graphic>
           <a:graphicData uri="http://schemas.openxmlformats.org/drawingml/2006/table">
@@ -9993,9 +9993,9 @@
                 <a:tableStyleId>{5C22544A-7EE6-4342-B048-85BDC9FD1C3A}</a:tableStyleId>
               </a:tblPr>
               <a:tblGrid>
-                <a:gridCol w="4572000"/>
-                <a:gridCol w="3383280"/>
-                <a:gridCol w="3383280"/>
+                <a:gridCol w="4387645"/>
+                <a:gridCol w="3246857"/>
+                <a:gridCol w="3246857"/>
               </a:tblGrid>
               <a:tr h="502920">
                 <a:tc>
@@ -10228,7 +10228,7 @@
           <a:noFill/>
         </p:spPr>
         <p:txBody>
-          <a:bodyPr wrap="none">
+          <a:bodyPr wrap="square">
             <a:spAutoFit/>
           </a:bodyPr>
           <a:lstStyle/>
@@ -10580,7 +10580,7 @@
           <a:noFill/>
         </p:spPr>
         <p:txBody>
-          <a:bodyPr wrap="none">
+          <a:bodyPr wrap="square">
             <a:spAutoFit/>
           </a:bodyPr>
           <a:lstStyle/>
@@ -10820,7 +10820,7 @@
         </p:nvGraphicFramePr>
         <p:xfrm>
           <a:off x="640080" y="1371600"/>
-          <a:ext cx="11338560" cy="2011680"/>
+          <a:ext cx="10881358" cy="2011680"/>
         </p:xfrm>
         <a:graphic>
           <a:graphicData uri="http://schemas.openxmlformats.org/drawingml/2006/table">
@@ -10829,9 +10829,9 @@
                 <a:tableStyleId>{5C22544A-7EE6-4342-B048-85BDC9FD1C3A}</a:tableStyleId>
               </a:tblPr>
               <a:tblGrid>
-                <a:gridCol w="4937760"/>
-                <a:gridCol w="3200400"/>
-                <a:gridCol w="3200400"/>
+                <a:gridCol w="4738656"/>
+                <a:gridCol w="3071351"/>
+                <a:gridCol w="3071351"/>
               </a:tblGrid>
               <a:tr h="502920">
                 <a:tc>
@@ -11135,7 +11135,7 @@
           <a:noFill/>
         </p:spPr>
         <p:txBody>
-          <a:bodyPr wrap="none">
+          <a:bodyPr wrap="square">
             <a:spAutoFit/>
           </a:bodyPr>
           <a:lstStyle/>
@@ -11871,7 +11871,7 @@
         </p:nvGraphicFramePr>
         <p:xfrm>
           <a:off x="640080" y="1371600"/>
-          <a:ext cx="13167360" cy="2011680"/>
+          <a:ext cx="10881359" cy="2011680"/>
         </p:xfrm>
         <a:graphic>
           <a:graphicData uri="http://schemas.openxmlformats.org/drawingml/2006/table">
@@ -11880,10 +11880,10 @@
                 <a:tableStyleId>{5C22544A-7EE6-4342-B048-85BDC9FD1C3A}</a:tableStyleId>
               </a:tblPr>
               <a:tblGrid>
-                <a:gridCol w="4937760"/>
-                <a:gridCol w="2743200"/>
-                <a:gridCol w="2743200"/>
-                <a:gridCol w="2743200"/>
+                <a:gridCol w="4080509"/>
+                <a:gridCol w="2266950"/>
+                <a:gridCol w="2266950"/>
+                <a:gridCol w="2266950"/>
               </a:tblGrid>
               <a:tr h="502920">
                 <a:tc>
@@ -12279,7 +12279,7 @@
           <a:noFill/>
         </p:spPr>
         <p:txBody>
-          <a:bodyPr wrap="none">
+          <a:bodyPr wrap="square">
             <a:spAutoFit/>
           </a:bodyPr>
           <a:lstStyle/>
@@ -12306,6 +12306,1533 @@
 </file>
 
 <file path=ppt/slides/slide42.xml><?xml version="1.0" encoding="utf-8"?>
+<p:sld xmlns:a="http://schemas.openxmlformats.org/drawingml/2006/main" xmlns:p="http://schemas.openxmlformats.org/presentationml/2006/main" xmlns:r="http://schemas.openxmlformats.org/officeDocument/2006/relationships">
+  <p:cSld>
+    <p:spTree>
+      <p:nvGrpSpPr>
+        <p:cNvPr id="1" name=""/>
+        <p:cNvGrpSpPr/>
+        <p:nvPr/>
+      </p:nvGrpSpPr>
+      <p:grpSpPr/>
+      <p:sp>
+        <p:nvSpPr>
+          <p:cNvPr id="2" name="Rectangle 1"/>
+          <p:cNvSpPr/>
+          <p:nvPr/>
+        </p:nvSpPr>
+        <p:spPr>
+          <a:xfrm>
+            <a:off x="0" y="0"/>
+            <a:ext cx="12192000" cy="960120"/>
+          </a:xfrm>
+          <a:prstGeom prst="rect">
+            <a:avLst/>
+          </a:prstGeom>
+          <a:solidFill>
+            <a:srgbClr val="1F3A4D"/>
+          </a:solidFill>
+          <a:ln>
+            <a:noFill/>
+          </a:ln>
+        </p:spPr>
+        <p:style>
+          <a:lnRef idx="1">
+            <a:schemeClr val="accent1"/>
+          </a:lnRef>
+          <a:fillRef idx="3">
+            <a:schemeClr val="accent1"/>
+          </a:fillRef>
+          <a:effectRef idx="2">
+            <a:schemeClr val="accent1"/>
+          </a:effectRef>
+          <a:fontRef idx="minor">
+            <a:schemeClr val="lt1"/>
+          </a:fontRef>
+        </p:style>
+        <p:txBody>
+          <a:bodyPr rtlCol="0" anchor="ctr" lIns="365760" tIns="73152" wrap="square"/>
+          <a:lstStyle/>
+          <a:p>
+            <a:pPr algn="ctr">
+              <a:defRPr sz="2600" b="1">
+                <a:solidFill>
+                  <a:srgbClr val="FFFFFF"/>
+                </a:solidFill>
+              </a:defRPr>
+            </a:pPr>
+            <a:r>
+              <a:t>One More Lead: Could the Other Side's Own Storage Explain the Gap?</a:t>
+            </a:r>
+          </a:p>
+          <a:p>
+            <a:pPr>
+              <a:defRPr sz="1400">
+                <a:solidFill>
+                  <a:srgbClr val="C8D2DA"/>
+                </a:solidFill>
+              </a:defRPr>
+            </a:pPr>
+            <a:r>
+              <a:t>A real, testable idea - checked and ruled out</a:t>
+            </a:r>
+          </a:p>
+        </p:txBody>
+      </p:sp>
+      <p:sp>
+        <p:nvSpPr>
+          <p:cNvPr id="3" name="TextBox 2"/>
+          <p:cNvSpPr txBox="1"/>
+          <p:nvPr/>
+        </p:nvSpPr>
+        <p:spPr>
+          <a:xfrm>
+            <a:off x="11551920" y="6446520"/>
+            <a:ext cx="457200" cy="320040"/>
+          </a:xfrm>
+          <a:prstGeom prst="rect">
+            <a:avLst/>
+          </a:prstGeom>
+          <a:noFill/>
+        </p:spPr>
+        <p:txBody>
+          <a:bodyPr wrap="none">
+            <a:spAutoFit/>
+          </a:bodyPr>
+          <a:lstStyle/>
+          <a:p>
+            <a:pPr>
+              <a:defRPr sz="1100">
+                <a:solidFill>
+                  <a:srgbClr val="5A605C"/>
+                </a:solidFill>
+              </a:defRPr>
+            </a:pPr>
+            <a:r>
+              <a:t>42</a:t>
+            </a:r>
+          </a:p>
+        </p:txBody>
+      </p:sp>
+      <p:sp>
+        <p:nvSpPr>
+          <p:cNvPr id="4" name="TextBox 3"/>
+          <p:cNvSpPr txBox="1"/>
+          <p:nvPr/>
+        </p:nvSpPr>
+        <p:spPr>
+          <a:xfrm>
+            <a:off x="502920" y="1234440"/>
+            <a:ext cx="11155680" cy="5303520"/>
+          </a:xfrm>
+          <a:prstGeom prst="rect">
+            <a:avLst/>
+          </a:prstGeom>
+          <a:noFill/>
+        </p:spPr>
+        <p:txBody>
+          <a:bodyPr wrap="square">
+            <a:spAutoFit/>
+          </a:bodyPr>
+          <a:lstStyle/>
+          <a:p>
+            <a:pPr>
+              <a:spcAft>
+                <a:spcPts val="1000"/>
+              </a:spcAft>
+              <a:defRPr sz="1800" b="1">
+                <a:solidFill>
+                  <a:srgbClr val="1E2220"/>
+                </a:solidFill>
+              </a:defRPr>
+            </a:pPr>
+            <a:r>
+              <a:t>•  The one open thread from before: a small number of extreme hours where Germany imports less than it could, even with spare capacity available</a:t>
+            </a:r>
+          </a:p>
+          <a:p>
+            <a:pPr>
+              <a:spcAft>
+                <a:spcPts val="1000"/>
+              </a:spcAft>
+              <a:defRPr sz="1800" b="1">
+                <a:solidFill>
+                  <a:srgbClr val="1E2220"/>
+                </a:solidFill>
+              </a:defRPr>
+            </a:pPr>
+            <a:r>
+              <a:t>•  Tested directly using data already on hand: is the rest of Europe's own storage running physically empty during those hours?</a:t>
+            </a:r>
+          </a:p>
+          <a:p>
+            <a:pPr>
+              <a:spcAft>
+                <a:spcPts val="1000"/>
+              </a:spcAft>
+              <a:defRPr sz="1800" b="1">
+                <a:solidFill>
+                  <a:srgbClr val="1E2220"/>
+                </a:solidFill>
+              </a:defRPr>
+            </a:pPr>
+            <a:r>
+              <a:t>•  Checked both battery-style storage and reservoir hydro on the other side of the border - neither ever comes close to its own physical limit, in either year tested</a:t>
+            </a:r>
+          </a:p>
+          <a:p>
+            <a:pPr>
+              <a:spcAft>
+                <a:spcPts val="1000"/>
+              </a:spcAft>
+              <a:defRPr sz="1800" b="1">
+                <a:solidFill>
+                  <a:srgbClr val="1E2220"/>
+                </a:solidFill>
+              </a:defRPr>
+            </a:pPr>
+            <a:r>
+              <a:t>•  Rules out 'the other side simply has nothing left to give' - strengthens the case that the real limiter is inside the model's own internal trading logic, not a real-world capacity constraint anywhere</a:t>
+            </a:r>
+          </a:p>
+        </p:txBody>
+      </p:sp>
+    </p:spTree>
+  </p:cSld>
+  <p:clrMapOvr>
+    <a:masterClrMapping/>
+  </p:clrMapOvr>
+</p:sld>
+</file>
+
+<file path=ppt/slides/slide43.xml><?xml version="1.0" encoding="utf-8"?>
+<p:sld xmlns:a="http://schemas.openxmlformats.org/drawingml/2006/main" xmlns:p="http://schemas.openxmlformats.org/presentationml/2006/main" xmlns:r="http://schemas.openxmlformats.org/officeDocument/2006/relationships">
+  <p:cSld>
+    <p:spTree>
+      <p:nvGrpSpPr>
+        <p:cNvPr id="1" name=""/>
+        <p:cNvGrpSpPr/>
+        <p:nvPr/>
+      </p:nvGrpSpPr>
+      <p:grpSpPr/>
+      <p:sp>
+        <p:nvSpPr>
+          <p:cNvPr id="2" name="Rectangle 1"/>
+          <p:cNvSpPr/>
+          <p:nvPr/>
+        </p:nvSpPr>
+        <p:spPr>
+          <a:xfrm>
+            <a:off x="0" y="0"/>
+            <a:ext cx="12192000" cy="960120"/>
+          </a:xfrm>
+          <a:prstGeom prst="rect">
+            <a:avLst/>
+          </a:prstGeom>
+          <a:solidFill>
+            <a:srgbClr val="1F3A4D"/>
+          </a:solidFill>
+          <a:ln>
+            <a:noFill/>
+          </a:ln>
+        </p:spPr>
+        <p:style>
+          <a:lnRef idx="1">
+            <a:schemeClr val="accent1"/>
+          </a:lnRef>
+          <a:fillRef idx="3">
+            <a:schemeClr val="accent1"/>
+          </a:fillRef>
+          <a:effectRef idx="2">
+            <a:schemeClr val="accent1"/>
+          </a:effectRef>
+          <a:fontRef idx="minor">
+            <a:schemeClr val="lt1"/>
+          </a:fontRef>
+        </p:style>
+        <p:txBody>
+          <a:bodyPr rtlCol="0" anchor="ctr" lIns="365760" tIns="73152" wrap="square"/>
+          <a:lstStyle/>
+          <a:p>
+            <a:pPr algn="ctr">
+              <a:defRPr sz="2600" b="1">
+                <a:solidFill>
+                  <a:srgbClr val="FFFFFF"/>
+                </a:solidFill>
+              </a:defRPr>
+            </a:pPr>
+            <a:r>
+              <a:t>Pushing Further: Replacing the Combined Zone With a Real Named Country</a:t>
+            </a:r>
+          </a:p>
+          <a:p>
+            <a:pPr>
+              <a:defRPr sz="1400">
+                <a:solidFill>
+                  <a:srgbClr val="C8D2DA"/>
+                </a:solidFill>
+              </a:defRPr>
+            </a:pPr>
+            <a:r>
+              <a:t>Testing whether more realism helps, or whether the combined approach was already the right call</a:t>
+            </a:r>
+          </a:p>
+        </p:txBody>
+      </p:sp>
+      <p:sp>
+        <p:nvSpPr>
+          <p:cNvPr id="3" name="TextBox 2"/>
+          <p:cNvSpPr txBox="1"/>
+          <p:nvPr/>
+        </p:nvSpPr>
+        <p:spPr>
+          <a:xfrm>
+            <a:off x="11551920" y="6446520"/>
+            <a:ext cx="457200" cy="320040"/>
+          </a:xfrm>
+          <a:prstGeom prst="rect">
+            <a:avLst/>
+          </a:prstGeom>
+          <a:noFill/>
+        </p:spPr>
+        <p:txBody>
+          <a:bodyPr wrap="none">
+            <a:spAutoFit/>
+          </a:bodyPr>
+          <a:lstStyle/>
+          <a:p>
+            <a:pPr>
+              <a:defRPr sz="1100">
+                <a:solidFill>
+                  <a:srgbClr val="5A605C"/>
+                </a:solidFill>
+              </a:defRPr>
+            </a:pPr>
+            <a:r>
+              <a:t>43</a:t>
+            </a:r>
+          </a:p>
+        </p:txBody>
+      </p:sp>
+      <p:sp>
+        <p:nvSpPr>
+          <p:cNvPr id="4" name="TextBox 3"/>
+          <p:cNvSpPr txBox="1"/>
+          <p:nvPr/>
+        </p:nvSpPr>
+        <p:spPr>
+          <a:xfrm>
+            <a:off x="502920" y="1234440"/>
+            <a:ext cx="11155680" cy="5303520"/>
+          </a:xfrm>
+          <a:prstGeom prst="rect">
+            <a:avLst/>
+          </a:prstGeom>
+          <a:noFill/>
+        </p:spPr>
+        <p:txBody>
+          <a:bodyPr wrap="square">
+            <a:spAutoFit/>
+          </a:bodyPr>
+          <a:lstStyle/>
+          <a:p>
+            <a:pPr>
+              <a:spcAft>
+                <a:spcPts val="1000"/>
+              </a:spcAft>
+              <a:defRPr sz="1800" b="1">
+                <a:solidFill>
+                  <a:srgbClr val="1E2220"/>
+                </a:solidFill>
+              </a:defRPr>
+            </a:pPr>
+            <a:r>
+              <a:t>•  Everything so far treated 'the rest of Europe' as one combined stand-in - the next real question: does splitting out a real neighbour by name do any better?</a:t>
+            </a:r>
+          </a:p>
+          <a:p>
+            <a:pPr>
+              <a:spcAft>
+                <a:spcPts val="1000"/>
+              </a:spcAft>
+              <a:defRPr sz="1800" b="1">
+                <a:solidFill>
+                  <a:srgbClr val="1E2220"/>
+                </a:solidFill>
+              </a:defRPr>
+            </a:pPr>
+            <a:r>
+              <a:t>•  Chose France as the test case: the largest single economy involved, and the one country with enough real, already-sourced data to build immediately</a:t>
+            </a:r>
+          </a:p>
+          <a:p>
+            <a:pPr>
+              <a:spcAft>
+                <a:spcPts val="1000"/>
+              </a:spcAft>
+              <a:defRPr sz="1800" b="1">
+                <a:solidFill>
+                  <a:srgbClr val="1E2220"/>
+                </a:solidFill>
+              </a:defRPr>
+            </a:pPr>
+            <a:r>
+              <a:t>•  Built it properly: France's own real power plants, real demand, real weather-driven renewables, and a real border link to Germany - not a shortcut</a:t>
+            </a:r>
+          </a:p>
+        </p:txBody>
+      </p:sp>
+    </p:spTree>
+  </p:cSld>
+  <p:clrMapOvr>
+    <a:masterClrMapping/>
+  </p:clrMapOvr>
+</p:sld>
+</file>
+
+<file path=ppt/slides/slide44.xml><?xml version="1.0" encoding="utf-8"?>
+<p:sld xmlns:a="http://schemas.openxmlformats.org/drawingml/2006/main" xmlns:p="http://schemas.openxmlformats.org/presentationml/2006/main" xmlns:r="http://schemas.openxmlformats.org/officeDocument/2006/relationships">
+  <p:cSld>
+    <p:spTree>
+      <p:nvGrpSpPr>
+        <p:cNvPr id="1" name=""/>
+        <p:cNvGrpSpPr/>
+        <p:nvPr/>
+      </p:nvGrpSpPr>
+      <p:grpSpPr/>
+      <p:sp>
+        <p:nvSpPr>
+          <p:cNvPr id="2" name="Rectangle 1"/>
+          <p:cNvSpPr/>
+          <p:nvPr/>
+        </p:nvSpPr>
+        <p:spPr>
+          <a:xfrm>
+            <a:off x="0" y="0"/>
+            <a:ext cx="12192000" cy="960120"/>
+          </a:xfrm>
+          <a:prstGeom prst="rect">
+            <a:avLst/>
+          </a:prstGeom>
+          <a:solidFill>
+            <a:srgbClr val="1F3A4D"/>
+          </a:solidFill>
+          <a:ln>
+            <a:noFill/>
+          </a:ln>
+        </p:spPr>
+        <p:style>
+          <a:lnRef idx="1">
+            <a:schemeClr val="accent1"/>
+          </a:lnRef>
+          <a:fillRef idx="3">
+            <a:schemeClr val="accent1"/>
+          </a:fillRef>
+          <a:effectRef idx="2">
+            <a:schemeClr val="accent1"/>
+          </a:effectRef>
+          <a:fontRef idx="minor">
+            <a:schemeClr val="lt1"/>
+          </a:fontRef>
+        </p:style>
+        <p:txBody>
+          <a:bodyPr rtlCol="0" anchor="ctr" lIns="365760" tIns="73152" wrap="square"/>
+          <a:lstStyle/>
+          <a:p>
+            <a:pPr algn="ctr">
+              <a:defRPr sz="2600" b="1">
+                <a:solidFill>
+                  <a:srgbClr val="FFFFFF"/>
+                </a:solidFill>
+              </a:defRPr>
+            </a:pPr>
+            <a:r>
+              <a:t>Result: A Real Step Backward - With a Clear, Understood Reason</a:t>
+            </a:r>
+          </a:p>
+          <a:p>
+            <a:pPr>
+              <a:defRPr sz="1400">
+                <a:solidFill>
+                  <a:srgbClr val="C8D2DA"/>
+                </a:solidFill>
+              </a:defRPr>
+            </a:pPr>
+            <a:r>
+              <a:t>Splitting France out on its own made things worse, not better</a:t>
+            </a:r>
+          </a:p>
+        </p:txBody>
+      </p:sp>
+      <p:sp>
+        <p:nvSpPr>
+          <p:cNvPr id="3" name="TextBox 2"/>
+          <p:cNvSpPr txBox="1"/>
+          <p:nvPr/>
+        </p:nvSpPr>
+        <p:spPr>
+          <a:xfrm>
+            <a:off x="11551920" y="6446520"/>
+            <a:ext cx="457200" cy="320040"/>
+          </a:xfrm>
+          <a:prstGeom prst="rect">
+            <a:avLst/>
+          </a:prstGeom>
+          <a:noFill/>
+        </p:spPr>
+        <p:txBody>
+          <a:bodyPr wrap="none">
+            <a:spAutoFit/>
+          </a:bodyPr>
+          <a:lstStyle/>
+          <a:p>
+            <a:pPr>
+              <a:defRPr sz="1100">
+                <a:solidFill>
+                  <a:srgbClr val="5A605C"/>
+                </a:solidFill>
+              </a:defRPr>
+            </a:pPr>
+            <a:r>
+              <a:t>44</a:t>
+            </a:r>
+          </a:p>
+        </p:txBody>
+      </p:sp>
+      <p:graphicFrame>
+        <p:nvGraphicFramePr>
+          <p:cNvPr id="4" name="Table 3"/>
+          <p:cNvGraphicFramePr>
+            <a:graphicFrameLocks noGrp="1"/>
+          </p:cNvGraphicFramePr>
+          <p:nvPr/>
+        </p:nvGraphicFramePr>
+        <p:xfrm>
+          <a:off x="640080" y="1371600"/>
+          <a:ext cx="10881359" cy="1508760"/>
+        </p:xfrm>
+        <a:graphic>
+          <a:graphicData uri="http://schemas.openxmlformats.org/drawingml/2006/table">
+            <a:tbl>
+              <a:tblPr firstRow="1" bandRow="1">
+                <a:tableStyleId>{5C22544A-7EE6-4342-B048-85BDC9FD1C3A}</a:tableStyleId>
+              </a:tblPr>
+              <a:tblGrid>
+                <a:gridCol w="4385025"/>
+                <a:gridCol w="3248167"/>
+                <a:gridCol w="3248167"/>
+              </a:tblGrid>
+              <a:tr h="502920">
+                <a:tc>
+                  <a:txBody>
+                    <a:bodyPr/>
+                    <a:lstStyle/>
+                    <a:p>
+                      <a:pPr algn="ctr">
+                        <a:defRPr b="1" sz="1300">
+                          <a:solidFill>
+                            <a:srgbClr val="FFFFFF"/>
+                          </a:solidFill>
+                        </a:defRPr>
+                      </a:pPr>
+                    </a:p>
+                  </a:txBody>
+                  <a:tcPr>
+                    <a:solidFill>
+                      <a:srgbClr val="1F3A4D"/>
+                    </a:solidFill>
+                  </a:tcPr>
+                </a:tc>
+                <a:tc>
+                  <a:txBody>
+                    <a:bodyPr/>
+                    <a:lstStyle/>
+                    <a:p>
+                      <a:pPr algn="ctr">
+                        <a:defRPr b="1" sz="1300">
+                          <a:solidFill>
+                            <a:srgbClr val="FFFFFF"/>
+                          </a:solidFill>
+                        </a:defRPr>
+                      </a:pPr>
+                      <a:r>
+                        <a:t>Combined zone (best result)</a:t>
+                      </a:r>
+                    </a:p>
+                  </a:txBody>
+                  <a:tcPr>
+                    <a:solidFill>
+                      <a:srgbClr val="1F3A4D"/>
+                    </a:solidFill>
+                  </a:tcPr>
+                </a:tc>
+                <a:tc>
+                  <a:txBody>
+                    <a:bodyPr/>
+                    <a:lstStyle/>
+                    <a:p>
+                      <a:pPr algn="ctr">
+                        <a:defRPr b="1" sz="1300">
+                          <a:solidFill>
+                            <a:srgbClr val="FFFFFF"/>
+                          </a:solidFill>
+                        </a:defRPr>
+                      </a:pPr>
+                      <a:r>
+                        <a:t>France split out separately</a:t>
+                      </a:r>
+                    </a:p>
+                  </a:txBody>
+                  <a:tcPr>
+                    <a:solidFill>
+                      <a:srgbClr val="1F3A4D"/>
+                    </a:solidFill>
+                  </a:tcPr>
+                </a:tc>
+              </a:tr>
+              <a:tr h="502920">
+                <a:tc>
+                  <a:txBody>
+                    <a:bodyPr/>
+                    <a:lstStyle/>
+                    <a:p>
+                      <a:pPr algn="ctr">
+                        <a:defRPr sz="1200" b="1">
+                          <a:solidFill>
+                            <a:srgbClr val="1E2220"/>
+                          </a:solidFill>
+                        </a:defRPr>
+                      </a:pPr>
+                      <a:r>
+                        <a:t>'Ran out of power' hours</a:t>
+                      </a:r>
+                    </a:p>
+                  </a:txBody>
+                  <a:tcPr>
+                    <a:solidFill>
+                      <a:srgbClr val="FFFFFF"/>
+                    </a:solidFill>
+                  </a:tcPr>
+                </a:tc>
+                <a:tc>
+                  <a:txBody>
+                    <a:bodyPr/>
+                    <a:lstStyle/>
+                    <a:p>
+                      <a:pPr algn="ctr">
+                        <a:defRPr sz="1200" b="0">
+                          <a:solidFill>
+                            <a:srgbClr val="1E2220"/>
+                          </a:solidFill>
+                        </a:defRPr>
+                      </a:pPr>
+                      <a:r>
+                        <a:t>7</a:t>
+                      </a:r>
+                    </a:p>
+                  </a:txBody>
+                  <a:tcPr>
+                    <a:solidFill>
+                      <a:srgbClr val="FFFFFF"/>
+                    </a:solidFill>
+                  </a:tcPr>
+                </a:tc>
+                <a:tc>
+                  <a:txBody>
+                    <a:bodyPr/>
+                    <a:lstStyle/>
+                    <a:p>
+                      <a:pPr algn="ctr">
+                        <a:defRPr sz="1200" b="0">
+                          <a:solidFill>
+                            <a:srgbClr val="1E2220"/>
+                          </a:solidFill>
+                        </a:defRPr>
+                      </a:pPr>
+                      <a:r>
+                        <a:t>167</a:t>
+                      </a:r>
+                    </a:p>
+                  </a:txBody>
+                  <a:tcPr>
+                    <a:solidFill>
+                      <a:srgbClr val="FFFFFF"/>
+                    </a:solidFill>
+                  </a:tcPr>
+                </a:tc>
+              </a:tr>
+              <a:tr h="502920">
+                <a:tc>
+                  <a:txBody>
+                    <a:bodyPr/>
+                    <a:lstStyle/>
+                    <a:p>
+                      <a:pPr algn="ctr">
+                        <a:defRPr sz="1200" b="1">
+                          <a:solidFill>
+                            <a:srgbClr val="1E2220"/>
+                          </a:solidFill>
+                        </a:defRPr>
+                      </a:pPr>
+                      <a:r>
+                        <a:t>Average price gap on ordinary days</a:t>
+                      </a:r>
+                    </a:p>
+                  </a:txBody>
+                  <a:tcPr>
+                    <a:solidFill>
+                      <a:srgbClr val="EEF0E9"/>
+                    </a:solidFill>
+                  </a:tcPr>
+                </a:tc>
+                <a:tc>
+                  <a:txBody>
+                    <a:bodyPr/>
+                    <a:lstStyle/>
+                    <a:p>
+                      <a:pPr algn="ctr">
+                        <a:defRPr sz="1200" b="0">
+                          <a:solidFill>
+                            <a:srgbClr val="1E2220"/>
+                          </a:solidFill>
+                        </a:defRPr>
+                      </a:pPr>
+                      <a:r>
+                        <a:t>-2.90</a:t>
+                      </a:r>
+                    </a:p>
+                  </a:txBody>
+                  <a:tcPr>
+                    <a:solidFill>
+                      <a:srgbClr val="EEF0E9"/>
+                    </a:solidFill>
+                  </a:tcPr>
+                </a:tc>
+                <a:tc>
+                  <a:txBody>
+                    <a:bodyPr/>
+                    <a:lstStyle/>
+                    <a:p>
+                      <a:pPr algn="ctr">
+                        <a:defRPr sz="1200" b="0">
+                          <a:solidFill>
+                            <a:srgbClr val="1E2220"/>
+                          </a:solidFill>
+                        </a:defRPr>
+                      </a:pPr>
+                      <a:r>
+                        <a:t>+9.65</a:t>
+                      </a:r>
+                    </a:p>
+                  </a:txBody>
+                  <a:tcPr>
+                    <a:solidFill>
+                      <a:srgbClr val="EEF0E9"/>
+                    </a:solidFill>
+                  </a:tcPr>
+                </a:tc>
+              </a:tr>
+            </a:tbl>
+          </a:graphicData>
+        </a:graphic>
+      </p:graphicFrame>
+      <p:sp>
+        <p:nvSpPr>
+          <p:cNvPr id="5" name="TextBox 4"/>
+          <p:cNvSpPr txBox="1"/>
+          <p:nvPr/>
+        </p:nvSpPr>
+        <p:spPr>
+          <a:xfrm>
+            <a:off x="640080" y="3063240"/>
+            <a:ext cx="10881360" cy="1097280"/>
+          </a:xfrm>
+          <a:prstGeom prst="rect">
+            <a:avLst/>
+          </a:prstGeom>
+          <a:noFill/>
+        </p:spPr>
+        <p:txBody>
+          <a:bodyPr wrap="square">
+            <a:spAutoFit/>
+          </a:bodyPr>
+          <a:lstStyle/>
+          <a:p>
+            <a:pPr>
+              <a:defRPr sz="1300" i="1">
+                <a:solidFill>
+                  <a:srgbClr val="5A605C"/>
+                </a:solidFill>
+              </a:defRPr>
+            </a:pPr>
+            <a:r>
+              <a:t>Real, checked reason: France's own huge nuclear fleet used to help keep the WHOLE combined pool well-supplied. Pulled out on its own, the remaining combined zone lost that cushion and became genuinely short more often - while France's own surplus, now only linked directly to Germany by a narrow border, couldn't reach the rest of Europe to help there either.</a:t>
+            </a:r>
+          </a:p>
+        </p:txBody>
+      </p:sp>
+    </p:spTree>
+  </p:cSld>
+  <p:clrMapOvr>
+    <a:masterClrMapping/>
+  </p:clrMapOvr>
+</p:sld>
+</file>
+
+<file path=ppt/slides/slide45.xml><?xml version="1.0" encoding="utf-8"?>
+<p:sld xmlns:a="http://schemas.openxmlformats.org/drawingml/2006/main" xmlns:p="http://schemas.openxmlformats.org/presentationml/2006/main" xmlns:r="http://schemas.openxmlformats.org/officeDocument/2006/relationships">
+  <p:cSld>
+    <p:spTree>
+      <p:nvGrpSpPr>
+        <p:cNvPr id="1" name=""/>
+        <p:cNvGrpSpPr/>
+        <p:nvPr/>
+      </p:nvGrpSpPr>
+      <p:grpSpPr/>
+      <p:sp>
+        <p:nvSpPr>
+          <p:cNvPr id="2" name="Rectangle 1"/>
+          <p:cNvSpPr/>
+          <p:nvPr/>
+        </p:nvSpPr>
+        <p:spPr>
+          <a:xfrm>
+            <a:off x="0" y="0"/>
+            <a:ext cx="12192000" cy="960120"/>
+          </a:xfrm>
+          <a:prstGeom prst="rect">
+            <a:avLst/>
+          </a:prstGeom>
+          <a:solidFill>
+            <a:srgbClr val="1F3A4D"/>
+          </a:solidFill>
+          <a:ln>
+            <a:noFill/>
+          </a:ln>
+        </p:spPr>
+        <p:style>
+          <a:lnRef idx="1">
+            <a:schemeClr val="accent1"/>
+          </a:lnRef>
+          <a:fillRef idx="3">
+            <a:schemeClr val="accent1"/>
+          </a:fillRef>
+          <a:effectRef idx="2">
+            <a:schemeClr val="accent1"/>
+          </a:effectRef>
+          <a:fontRef idx="minor">
+            <a:schemeClr val="lt1"/>
+          </a:fontRef>
+        </p:style>
+        <p:txBody>
+          <a:bodyPr rtlCol="0" anchor="ctr" lIns="365760" tIns="73152" wrap="square"/>
+          <a:lstStyle/>
+          <a:p>
+            <a:pPr algn="ctr">
+              <a:defRPr sz="2600" b="1">
+                <a:solidFill>
+                  <a:srgbClr val="FFFFFF"/>
+                </a:solidFill>
+              </a:defRPr>
+            </a:pPr>
+            <a:r>
+              <a:t>Going All the Way: All 10 Real Neighbouring Countries at Once</a:t>
+            </a:r>
+          </a:p>
+          <a:p>
+            <a:pPr>
+              <a:defRPr sz="1400">
+                <a:solidFill>
+                  <a:srgbClr val="C8D2DA"/>
+                </a:solidFill>
+              </a:defRPr>
+            </a:pPr>
+            <a:r>
+              <a:t>A genuine engineering problem, found, diagnosed, and fixed along the way</a:t>
+            </a:r>
+          </a:p>
+        </p:txBody>
+      </p:sp>
+      <p:sp>
+        <p:nvSpPr>
+          <p:cNvPr id="3" name="TextBox 2"/>
+          <p:cNvSpPr txBox="1"/>
+          <p:nvPr/>
+        </p:nvSpPr>
+        <p:spPr>
+          <a:xfrm>
+            <a:off x="11551920" y="6446520"/>
+            <a:ext cx="457200" cy="320040"/>
+          </a:xfrm>
+          <a:prstGeom prst="rect">
+            <a:avLst/>
+          </a:prstGeom>
+          <a:noFill/>
+        </p:spPr>
+        <p:txBody>
+          <a:bodyPr wrap="none">
+            <a:spAutoFit/>
+          </a:bodyPr>
+          <a:lstStyle/>
+          <a:p>
+            <a:pPr>
+              <a:defRPr sz="1100">
+                <a:solidFill>
+                  <a:srgbClr val="5A605C"/>
+                </a:solidFill>
+              </a:defRPr>
+            </a:pPr>
+            <a:r>
+              <a:t>45</a:t>
+            </a:r>
+          </a:p>
+        </p:txBody>
+      </p:sp>
+      <p:sp>
+        <p:nvSpPr>
+          <p:cNvPr id="4" name="TextBox 3"/>
+          <p:cNvSpPr txBox="1"/>
+          <p:nvPr/>
+        </p:nvSpPr>
+        <p:spPr>
+          <a:xfrm>
+            <a:off x="502920" y="1234440"/>
+            <a:ext cx="11155680" cy="5303520"/>
+          </a:xfrm>
+          <a:prstGeom prst="rect">
+            <a:avLst/>
+          </a:prstGeom>
+          <a:noFill/>
+        </p:spPr>
+        <p:txBody>
+          <a:bodyPr wrap="square">
+            <a:spAutoFit/>
+          </a:bodyPr>
+          <a:lstStyle/>
+          <a:p>
+            <a:pPr>
+              <a:spcAft>
+                <a:spcPts val="1000"/>
+              </a:spcAft>
+              <a:defRPr sz="1800" b="1">
+                <a:solidFill>
+                  <a:srgbClr val="1E2220"/>
+                </a:solidFill>
+              </a:defRPr>
+            </a:pPr>
+            <a:r>
+              <a:t>•  Since one real country made things worse for a clear, understood reason, the natural next test: does the SAME problem get worse - or does something different happen - once every real neighbour is split out?</a:t>
+            </a:r>
+          </a:p>
+          <a:p>
+            <a:pPr>
+              <a:spcAft>
+                <a:spcPts val="1000"/>
+              </a:spcAft>
+              <a:defRPr sz="1800" b="1">
+                <a:solidFill>
+                  <a:srgbClr val="1E2220"/>
+                </a:solidFill>
+              </a:defRPr>
+            </a:pPr>
+            <a:r>
+              <a:t>•  Built all 10 real countries as their own separate zones - the largest build of the whole project</a:t>
+            </a:r>
+          </a:p>
+          <a:p>
+            <a:pPr>
+              <a:spcAft>
+                <a:spcPts val="1000"/>
+              </a:spcAft>
+              <a:defRPr sz="1800" b="1">
+                <a:solidFill>
+                  <a:srgbClr val="1E2220"/>
+                </a:solidFill>
+              </a:defRPr>
+            </a:pPr>
+            <a:r>
+              <a:t>•  Hit a genuine, hard technical bug along the way: the model's own dispatch engine broke down for one specific country (Denmark) - traced directly to Denmark's real hydro power being far too small in absolute terms for the model to handle reliably</a:t>
+            </a:r>
+          </a:p>
+          <a:p>
+            <a:pPr>
+              <a:spcAft>
+                <a:spcPts val="1000"/>
+              </a:spcAft>
+              <a:defRPr sz="1800" b="1">
+                <a:solidFill>
+                  <a:srgbClr val="1E2220"/>
+                </a:solidFill>
+              </a:defRPr>
+            </a:pPr>
+            <a:r>
+              <a:t>•  Fixed with a clearly labelled, honestly-flagged technical workaround (not real data) - confirmed the fix worked, then completed the full 10-country run</a:t>
+            </a:r>
+          </a:p>
+        </p:txBody>
+      </p:sp>
+    </p:spTree>
+  </p:cSld>
+  <p:clrMapOvr>
+    <a:masterClrMapping/>
+  </p:clrMapOvr>
+</p:sld>
+</file>
+
+<file path=ppt/slides/slide46.xml><?xml version="1.0" encoding="utf-8"?>
+<p:sld xmlns:a="http://schemas.openxmlformats.org/drawingml/2006/main" xmlns:p="http://schemas.openxmlformats.org/presentationml/2006/main" xmlns:r="http://schemas.openxmlformats.org/officeDocument/2006/relationships">
+  <p:cSld>
+    <p:spTree>
+      <p:nvGrpSpPr>
+        <p:cNvPr id="1" name=""/>
+        <p:cNvGrpSpPr/>
+        <p:nvPr/>
+      </p:nvGrpSpPr>
+      <p:grpSpPr/>
+      <p:sp>
+        <p:nvSpPr>
+          <p:cNvPr id="2" name="Rectangle 1"/>
+          <p:cNvSpPr/>
+          <p:nvPr/>
+        </p:nvSpPr>
+        <p:spPr>
+          <a:xfrm>
+            <a:off x="0" y="0"/>
+            <a:ext cx="12192000" cy="960120"/>
+          </a:xfrm>
+          <a:prstGeom prst="rect">
+            <a:avLst/>
+          </a:prstGeom>
+          <a:solidFill>
+            <a:srgbClr val="1F3A4D"/>
+          </a:solidFill>
+          <a:ln>
+            <a:noFill/>
+          </a:ln>
+        </p:spPr>
+        <p:style>
+          <a:lnRef idx="1">
+            <a:schemeClr val="accent1"/>
+          </a:lnRef>
+          <a:fillRef idx="3">
+            <a:schemeClr val="accent1"/>
+          </a:fillRef>
+          <a:effectRef idx="2">
+            <a:schemeClr val="accent1"/>
+          </a:effectRef>
+          <a:fontRef idx="minor">
+            <a:schemeClr val="lt1"/>
+          </a:fontRef>
+        </p:style>
+        <p:txBody>
+          <a:bodyPr rtlCol="0" anchor="ctr" lIns="365760" tIns="73152" wrap="square"/>
+          <a:lstStyle/>
+          <a:p>
+            <a:pPr algn="ctr">
+              <a:defRPr sz="2600" b="1">
+                <a:solidFill>
+                  <a:srgbClr val="FFFFFF"/>
+                </a:solidFill>
+              </a:defRPr>
+            </a:pPr>
+            <a:r>
+              <a:t>Result: Better Than Expected - But Still Not the Winning Approach</a:t>
+            </a:r>
+          </a:p>
+          <a:p>
+            <a:pPr>
+              <a:defRPr sz="1400">
+                <a:solidFill>
+                  <a:srgbClr val="C8D2DA"/>
+                </a:solidFill>
+              </a:defRPr>
+            </a:pPr>
+            <a:r>
+              <a:t>Splitting into all 10 real countries beat the single-country attempt on every measure but one</a:t>
+            </a:r>
+          </a:p>
+        </p:txBody>
+      </p:sp>
+      <p:sp>
+        <p:nvSpPr>
+          <p:cNvPr id="3" name="TextBox 2"/>
+          <p:cNvSpPr txBox="1"/>
+          <p:nvPr/>
+        </p:nvSpPr>
+        <p:spPr>
+          <a:xfrm>
+            <a:off x="11551920" y="6446520"/>
+            <a:ext cx="457200" cy="320040"/>
+          </a:xfrm>
+          <a:prstGeom prst="rect">
+            <a:avLst/>
+          </a:prstGeom>
+          <a:noFill/>
+        </p:spPr>
+        <p:txBody>
+          <a:bodyPr wrap="none">
+            <a:spAutoFit/>
+          </a:bodyPr>
+          <a:lstStyle/>
+          <a:p>
+            <a:pPr>
+              <a:defRPr sz="1100">
+                <a:solidFill>
+                  <a:srgbClr val="5A605C"/>
+                </a:solidFill>
+              </a:defRPr>
+            </a:pPr>
+            <a:r>
+              <a:t>46</a:t>
+            </a:r>
+          </a:p>
+        </p:txBody>
+      </p:sp>
+      <p:graphicFrame>
+        <p:nvGraphicFramePr>
+          <p:cNvPr id="4" name="Table 3"/>
+          <p:cNvGraphicFramePr>
+            <a:graphicFrameLocks noGrp="1"/>
+          </p:cNvGraphicFramePr>
+          <p:nvPr/>
+        </p:nvGraphicFramePr>
+        <p:xfrm>
+          <a:off x="640080" y="1371600"/>
+          <a:ext cx="10881359" cy="2011680"/>
+        </p:xfrm>
+        <a:graphic>
+          <a:graphicData uri="http://schemas.openxmlformats.org/drawingml/2006/table">
+            <a:tbl>
+              <a:tblPr firstRow="1" bandRow="1">
+                <a:tableStyleId>{5C22544A-7EE6-4342-B048-85BDC9FD1C3A}</a:tableStyleId>
+              </a:tblPr>
+              <a:tblGrid>
+                <a:gridCol w="3510116"/>
+                <a:gridCol w="2457081"/>
+                <a:gridCol w="2457081"/>
+                <a:gridCol w="2457081"/>
+              </a:tblGrid>
+              <a:tr h="502920">
+                <a:tc>
+                  <a:txBody>
+                    <a:bodyPr/>
+                    <a:lstStyle/>
+                    <a:p>
+                      <a:pPr algn="ctr">
+                        <a:defRPr b="1" sz="1300">
+                          <a:solidFill>
+                            <a:srgbClr val="FFFFFF"/>
+                          </a:solidFill>
+                        </a:defRPr>
+                      </a:pPr>
+                    </a:p>
+                  </a:txBody>
+                  <a:tcPr>
+                    <a:solidFill>
+                      <a:srgbClr val="1F3A4D"/>
+                    </a:solidFill>
+                  </a:tcPr>
+                </a:tc>
+                <a:tc>
+                  <a:txBody>
+                    <a:bodyPr/>
+                    <a:lstStyle/>
+                    <a:p>
+                      <a:pPr algn="ctr">
+                        <a:defRPr b="1" sz="1300">
+                          <a:solidFill>
+                            <a:srgbClr val="FFFFFF"/>
+                          </a:solidFill>
+                        </a:defRPr>
+                      </a:pPr>
+                      <a:r>
+                        <a:t>Combined zone (best)</a:t>
+                      </a:r>
+                    </a:p>
+                  </a:txBody>
+                  <a:tcPr>
+                    <a:solidFill>
+                      <a:srgbClr val="1F3A4D"/>
+                    </a:solidFill>
+                  </a:tcPr>
+                </a:tc>
+                <a:tc>
+                  <a:txBody>
+                    <a:bodyPr/>
+                    <a:lstStyle/>
+                    <a:p>
+                      <a:pPr algn="ctr">
+                        <a:defRPr b="1" sz="1300">
+                          <a:solidFill>
+                            <a:srgbClr val="FFFFFF"/>
+                          </a:solidFill>
+                        </a:defRPr>
+                      </a:pPr>
+                      <a:r>
+                        <a:t>France alone</a:t>
+                      </a:r>
+                    </a:p>
+                  </a:txBody>
+                  <a:tcPr>
+                    <a:solidFill>
+                      <a:srgbClr val="1F3A4D"/>
+                    </a:solidFill>
+                  </a:tcPr>
+                </a:tc>
+                <a:tc>
+                  <a:txBody>
+                    <a:bodyPr/>
+                    <a:lstStyle/>
+                    <a:p>
+                      <a:pPr algn="ctr">
+                        <a:defRPr b="1" sz="1300">
+                          <a:solidFill>
+                            <a:srgbClr val="FFFFFF"/>
+                          </a:solidFill>
+                        </a:defRPr>
+                      </a:pPr>
+                      <a:r>
+                        <a:t>All 10 countries</a:t>
+                      </a:r>
+                    </a:p>
+                  </a:txBody>
+                  <a:tcPr>
+                    <a:solidFill>
+                      <a:srgbClr val="1F3A4D"/>
+                    </a:solidFill>
+                  </a:tcPr>
+                </a:tc>
+              </a:tr>
+              <a:tr h="502920">
+                <a:tc>
+                  <a:txBody>
+                    <a:bodyPr/>
+                    <a:lstStyle/>
+                    <a:p>
+                      <a:pPr algn="ctr">
+                        <a:defRPr sz="1200" b="1">
+                          <a:solidFill>
+                            <a:srgbClr val="1E2220"/>
+                          </a:solidFill>
+                        </a:defRPr>
+                      </a:pPr>
+                      <a:r>
+                        <a:t>'Ran out of power' hours</a:t>
+                      </a:r>
+                    </a:p>
+                  </a:txBody>
+                  <a:tcPr>
+                    <a:solidFill>
+                      <a:srgbClr val="FFFFFF"/>
+                    </a:solidFill>
+                  </a:tcPr>
+                </a:tc>
+                <a:tc>
+                  <a:txBody>
+                    <a:bodyPr/>
+                    <a:lstStyle/>
+                    <a:p>
+                      <a:pPr algn="ctr">
+                        <a:defRPr sz="1200" b="0">
+                          <a:solidFill>
+                            <a:srgbClr val="1E2220"/>
+                          </a:solidFill>
+                        </a:defRPr>
+                      </a:pPr>
+                      <a:r>
+                        <a:t>7</a:t>
+                      </a:r>
+                    </a:p>
+                  </a:txBody>
+                  <a:tcPr>
+                    <a:solidFill>
+                      <a:srgbClr val="FFFFFF"/>
+                    </a:solidFill>
+                  </a:tcPr>
+                </a:tc>
+                <a:tc>
+                  <a:txBody>
+                    <a:bodyPr/>
+                    <a:lstStyle/>
+                    <a:p>
+                      <a:pPr algn="ctr">
+                        <a:defRPr sz="1200" b="0">
+                          <a:solidFill>
+                            <a:srgbClr val="1E2220"/>
+                          </a:solidFill>
+                        </a:defRPr>
+                      </a:pPr>
+                      <a:r>
+                        <a:t>167</a:t>
+                      </a:r>
+                    </a:p>
+                  </a:txBody>
+                  <a:tcPr>
+                    <a:solidFill>
+                      <a:srgbClr val="FFFFFF"/>
+                    </a:solidFill>
+                  </a:tcPr>
+                </a:tc>
+                <a:tc>
+                  <a:txBody>
+                    <a:bodyPr/>
+                    <a:lstStyle/>
+                    <a:p>
+                      <a:pPr algn="ctr">
+                        <a:defRPr sz="1200" b="0">
+                          <a:solidFill>
+                            <a:srgbClr val="1E2220"/>
+                          </a:solidFill>
+                        </a:defRPr>
+                      </a:pPr>
+                      <a:r>
+                        <a:t>120</a:t>
+                      </a:r>
+                    </a:p>
+                  </a:txBody>
+                  <a:tcPr>
+                    <a:solidFill>
+                      <a:srgbClr val="FFFFFF"/>
+                    </a:solidFill>
+                  </a:tcPr>
+                </a:tc>
+              </a:tr>
+              <a:tr h="502920">
+                <a:tc>
+                  <a:txBody>
+                    <a:bodyPr/>
+                    <a:lstStyle/>
+                    <a:p>
+                      <a:pPr algn="ctr">
+                        <a:defRPr sz="1200" b="1">
+                          <a:solidFill>
+                            <a:srgbClr val="1E2220"/>
+                          </a:solidFill>
+                        </a:defRPr>
+                      </a:pPr>
+                      <a:r>
+                        <a:t>Average price gap, ordinary days</a:t>
+                      </a:r>
+                    </a:p>
+                  </a:txBody>
+                  <a:tcPr>
+                    <a:solidFill>
+                      <a:srgbClr val="EEF0E9"/>
+                    </a:solidFill>
+                  </a:tcPr>
+                </a:tc>
+                <a:tc>
+                  <a:txBody>
+                    <a:bodyPr/>
+                    <a:lstStyle/>
+                    <a:p>
+                      <a:pPr algn="ctr">
+                        <a:defRPr sz="1200" b="0">
+                          <a:solidFill>
+                            <a:srgbClr val="1E2220"/>
+                          </a:solidFill>
+                        </a:defRPr>
+                      </a:pPr>
+                      <a:r>
+                        <a:t>-2.90</a:t>
+                      </a:r>
+                    </a:p>
+                  </a:txBody>
+                  <a:tcPr>
+                    <a:solidFill>
+                      <a:srgbClr val="EEF0E9"/>
+                    </a:solidFill>
+                  </a:tcPr>
+                </a:tc>
+                <a:tc>
+                  <a:txBody>
+                    <a:bodyPr/>
+                    <a:lstStyle/>
+                    <a:p>
+                      <a:pPr algn="ctr">
+                        <a:defRPr sz="1200" b="0">
+                          <a:solidFill>
+                            <a:srgbClr val="1E2220"/>
+                          </a:solidFill>
+                        </a:defRPr>
+                      </a:pPr>
+                      <a:r>
+                        <a:t>+9.65</a:t>
+                      </a:r>
+                    </a:p>
+                  </a:txBody>
+                  <a:tcPr>
+                    <a:solidFill>
+                      <a:srgbClr val="EEF0E9"/>
+                    </a:solidFill>
+                  </a:tcPr>
+                </a:tc>
+                <a:tc>
+                  <a:txBody>
+                    <a:bodyPr/>
+                    <a:lstStyle/>
+                    <a:p>
+                      <a:pPr algn="ctr">
+                        <a:defRPr sz="1200" b="0">
+                          <a:solidFill>
+                            <a:srgbClr val="1E2220"/>
+                          </a:solidFill>
+                        </a:defRPr>
+                      </a:pPr>
+                      <a:r>
+                        <a:t>+4.87</a:t>
+                      </a:r>
+                    </a:p>
+                  </a:txBody>
+                  <a:tcPr>
+                    <a:solidFill>
+                      <a:srgbClr val="EEF0E9"/>
+                    </a:solidFill>
+                  </a:tcPr>
+                </a:tc>
+              </a:tr>
+              <a:tr h="502920">
+                <a:tc>
+                  <a:txBody>
+                    <a:bodyPr/>
+                    <a:lstStyle/>
+                    <a:p>
+                      <a:pPr algn="ctr">
+                        <a:defRPr sz="1200" b="1">
+                          <a:solidFill>
+                            <a:srgbClr val="1E2220"/>
+                          </a:solidFill>
+                        </a:defRPr>
+                      </a:pPr>
+                      <a:r>
+                        <a:t>Match quality (trustworthiness)</a:t>
+                      </a:r>
+                    </a:p>
+                  </a:txBody>
+                  <a:tcPr>
+                    <a:solidFill>
+                      <a:srgbClr val="FFFFFF"/>
+                    </a:solidFill>
+                  </a:tcPr>
+                </a:tc>
+                <a:tc>
+                  <a:txBody>
+                    <a:bodyPr/>
+                    <a:lstStyle/>
+                    <a:p>
+                      <a:pPr algn="ctr">
+                        <a:defRPr sz="1200" b="0">
+                          <a:solidFill>
+                            <a:srgbClr val="1E2220"/>
+                          </a:solidFill>
+                        </a:defRPr>
+                      </a:pPr>
+                      <a:r>
+                        <a:t>0.717</a:t>
+                      </a:r>
+                    </a:p>
+                  </a:txBody>
+                  <a:tcPr>
+                    <a:solidFill>
+                      <a:srgbClr val="FFFFFF"/>
+                    </a:solidFill>
+                  </a:tcPr>
+                </a:tc>
+                <a:tc>
+                  <a:txBody>
+                    <a:bodyPr/>
+                    <a:lstStyle/>
+                    <a:p>
+                      <a:pPr algn="ctr">
+                        <a:defRPr sz="1200" b="0">
+                          <a:solidFill>
+                            <a:srgbClr val="1E2220"/>
+                          </a:solidFill>
+                        </a:defRPr>
+                      </a:pPr>
+                      <a:r>
+                        <a:t>0.716</a:t>
+                      </a:r>
+                    </a:p>
+                  </a:txBody>
+                  <a:tcPr>
+                    <a:solidFill>
+                      <a:srgbClr val="FFFFFF"/>
+                    </a:solidFill>
+                  </a:tcPr>
+                </a:tc>
+                <a:tc>
+                  <a:txBody>
+                    <a:bodyPr/>
+                    <a:lstStyle/>
+                    <a:p>
+                      <a:pPr algn="ctr">
+                        <a:defRPr sz="1200" b="0">
+                          <a:solidFill>
+                            <a:srgbClr val="1E2220"/>
+                          </a:solidFill>
+                        </a:defRPr>
+                      </a:pPr>
+                      <a:r>
+                        <a:t>0.731 (best yet)</a:t>
+                      </a:r>
+                    </a:p>
+                  </a:txBody>
+                  <a:tcPr>
+                    <a:solidFill>
+                      <a:srgbClr val="FFFFFF"/>
+                    </a:solidFill>
+                  </a:tcPr>
+                </a:tc>
+              </a:tr>
+            </a:tbl>
+          </a:graphicData>
+        </a:graphic>
+      </p:graphicFrame>
+      <p:sp>
+        <p:nvSpPr>
+          <p:cNvPr id="5" name="TextBox 4"/>
+          <p:cNvSpPr txBox="1"/>
+          <p:nvPr/>
+        </p:nvSpPr>
+        <p:spPr>
+          <a:xfrm>
+            <a:off x="640080" y="3566160"/>
+            <a:ext cx="10881360" cy="1097280"/>
+          </a:xfrm>
+          <a:prstGeom prst="rect">
+            <a:avLst/>
+          </a:prstGeom>
+          <a:noFill/>
+        </p:spPr>
+        <p:txBody>
+          <a:bodyPr wrap="square">
+            <a:spAutoFit/>
+          </a:bodyPr>
+          <a:lstStyle/>
+          <a:p>
+            <a:pPr>
+              <a:defRPr sz="1300" i="1">
+                <a:solidFill>
+                  <a:srgbClr val="5A605C"/>
+                </a:solidFill>
+              </a:defRPr>
+            </a:pPr>
+            <a:r>
+              <a:t>Genuinely surprising: going all the way to 10 real countries actually did BETTER than splitting out just one - likely because Germany can now draw on many countries' cheap power at once, instead of being stuck behind one narrow link. But it still doesn't beat the original combined-zone approach on the two measures that matter most. Decision: keep the combined zone as our best, standing result.</a:t>
+            </a:r>
+          </a:p>
+        </p:txBody>
+      </p:sp>
+    </p:spTree>
+  </p:cSld>
+  <p:clrMapOvr>
+    <a:masterClrMapping/>
+  </p:clrMapOvr>
+</p:sld>
+</file>
+
+<file path=ppt/slides/slide47.xml><?xml version="1.0" encoding="utf-8"?>
 <p:sld xmlns:a="http://schemas.openxmlformats.org/drawingml/2006/main" xmlns:r="http://schemas.openxmlformats.org/officeDocument/2006/relationships" xmlns:p="http://schemas.openxmlformats.org/presentationml/2006/main">
   <p:cSld>
     <p:spTree>
@@ -12419,7 +13946,7 @@
         </p:nvGraphicFramePr>
         <p:xfrm>
           <a:off x="457200" y="1280160"/>
-          <a:ext cx="11338560" cy="2514600"/>
+          <a:ext cx="10881359" cy="2514600"/>
         </p:xfrm>
         <a:graphic>
           <a:graphicData uri="http://schemas.openxmlformats.org/drawingml/2006/table">
@@ -12428,28 +13955,28 @@
                 <a:tableStyleId>{5C22544A-7EE6-4342-B048-85BDC9FD1C3A}</a:tableStyleId>
               </a:tblPr>
               <a:tblGrid>
-                <a:gridCol w="3657600">
+                <a:gridCol w="3510116">
                   <a:extLst>
                     <a:ext uri="{9D8B030D-6E8A-4147-A177-3AD203B41FA5}">
                       <a16:colId xmlns:a16="http://schemas.microsoft.com/office/drawing/2014/main" val="20000"/>
                     </a:ext>
                   </a:extLst>
                 </a:gridCol>
-                <a:gridCol w="2468880">
+                <a:gridCol w="2369328">
                   <a:extLst>
                     <a:ext uri="{9D8B030D-6E8A-4147-A177-3AD203B41FA5}">
                       <a16:colId xmlns:a16="http://schemas.microsoft.com/office/drawing/2014/main" val="20001"/>
                     </a:ext>
                   </a:extLst>
                 </a:gridCol>
-                <a:gridCol w="2468880">
+                <a:gridCol w="2369328">
                   <a:extLst>
                     <a:ext uri="{9D8B030D-6E8A-4147-A177-3AD203B41FA5}">
                       <a16:colId xmlns:a16="http://schemas.microsoft.com/office/drawing/2014/main" val="20002"/>
                     </a:ext>
                   </a:extLst>
                 </a:gridCol>
-                <a:gridCol w="2743200">
+                <a:gridCol w="2632587">
                   <a:extLst>
                     <a:ext uri="{9D8B030D-6E8A-4147-A177-3AD203B41FA5}">
                       <a16:colId xmlns:a16="http://schemas.microsoft.com/office/drawing/2014/main" val="20003"/>
@@ -12964,7 +14491,7 @@
 </p:sld>
 </file>
 
-<file path=ppt/slides/slide43.xml><?xml version="1.0" encoding="utf-8"?>
+<file path=ppt/slides/slide48.xml><?xml version="1.0" encoding="utf-8"?>
 <p:sld xmlns:a="http://schemas.openxmlformats.org/drawingml/2006/main" xmlns:r="http://schemas.openxmlformats.org/officeDocument/2006/relationships" xmlns:p="http://schemas.openxmlformats.org/presentationml/2006/main">
   <p:cSld>
     <p:spTree>
@@ -13109,7 +14636,7 @@
           <a:noFill/>
         </p:spPr>
         <p:txBody>
-          <a:bodyPr wrap="none">
+          <a:bodyPr wrap="square">
             <a:spAutoFit/>
           </a:bodyPr>
           <a:lstStyle/>
@@ -13135,7 +14662,7 @@
 </p:sld>
 </file>
 
-<file path=ppt/slides/slide44.xml><?xml version="1.0" encoding="utf-8"?>
+<file path=ppt/slides/slide49.xml><?xml version="1.0" encoding="utf-8"?>
 <p:sld xmlns:a="http://schemas.openxmlformats.org/drawingml/2006/main" xmlns:r="http://schemas.openxmlformats.org/officeDocument/2006/relationships" xmlns:p="http://schemas.openxmlformats.org/presentationml/2006/main">
   <p:cSld>
     <p:spTree>
@@ -13318,1118 +14845,6 @@
             </a:pPr>
             <a:r>
               <a:t>•  Continue folding all findings into the formal thesis documentation</a:t>
-            </a:r>
-          </a:p>
-        </p:txBody>
-      </p:sp>
-    </p:spTree>
-  </p:cSld>
-  <p:clrMapOvr>
-    <a:masterClrMapping/>
-  </p:clrMapOvr>
-</p:sld>
-</file>
-
-<file path=ppt/slides/slide45.xml><?xml version="1.0" encoding="utf-8"?>
-<p:sld xmlns:a="http://schemas.openxmlformats.org/drawingml/2006/main" xmlns:r="http://schemas.openxmlformats.org/officeDocument/2006/relationships" xmlns:p="http://schemas.openxmlformats.org/presentationml/2006/main">
-  <p:cSld>
-    <p:spTree>
-      <p:nvGrpSpPr>
-        <p:cNvPr id="1" name=""/>
-        <p:cNvGrpSpPr/>
-        <p:nvPr/>
-      </p:nvGrpSpPr>
-      <p:grpSpPr>
-        <a:xfrm>
-          <a:off x="0" y="0"/>
-          <a:ext cx="0" cy="0"/>
-          <a:chOff x="0" y="0"/>
-          <a:chExt cx="0" cy="0"/>
-        </a:xfrm>
-      </p:grpSpPr>
-      <p:sp>
-        <p:nvSpPr>
-          <p:cNvPr id="2" name="Rectangle 1"/>
-          <p:cNvSpPr/>
-          <p:nvPr/>
-        </p:nvSpPr>
-        <p:spPr>
-          <a:xfrm>
-            <a:off x="0" y="0"/>
-            <a:ext cx="12191695" cy="960120"/>
-          </a:xfrm>
-          <a:prstGeom prst="rect">
-            <a:avLst/>
-          </a:prstGeom>
-          <a:solidFill>
-            <a:srgbClr val="1F3A4D"/>
-          </a:solidFill>
-          <a:ln>
-            <a:noFill/>
-          </a:ln>
-        </p:spPr>
-        <p:style>
-          <a:lnRef idx="1">
-            <a:schemeClr val="accent1"/>
-          </a:lnRef>
-          <a:fillRef idx="3">
-            <a:schemeClr val="accent1"/>
-          </a:fillRef>
-          <a:effectRef idx="2">
-            <a:schemeClr val="accent1"/>
-          </a:effectRef>
-          <a:fontRef idx="minor">
-            <a:schemeClr val="lt1"/>
-          </a:fontRef>
-        </p:style>
-        <p:txBody>
-          <a:bodyPr wrap="square" lIns="365760" tIns="73152" rtlCol="0" anchor="ctr"/>
-          <a:lstStyle/>
-          <a:p>
-            <a:pPr algn="ctr">
-              <a:defRPr sz="2800" b="1">
-                <a:solidFill>
-                  <a:srgbClr val="FFFFFF"/>
-                </a:solidFill>
-              </a:defRPr>
-            </a:pPr>
-            <a:r>
-              <a:t>Questions &amp; Discussion</a:t>
-            </a:r>
-          </a:p>
-        </p:txBody>
-      </p:sp>
-      <p:sp>
-        <p:nvSpPr>
-          <p:cNvPr id="3" name="TextBox 2"/>
-          <p:cNvSpPr txBox="1"/>
-          <p:nvPr/>
-        </p:nvSpPr>
-        <p:spPr>
-          <a:xfrm>
-            <a:off x="11551615" y="6446520"/>
-            <a:ext cx="457200" cy="320040"/>
-          </a:xfrm>
-          <a:prstGeom prst="rect">
-            <a:avLst/>
-          </a:prstGeom>
-          <a:noFill/>
-        </p:spPr>
-        <p:txBody>
-          <a:bodyPr wrap="none">
-            <a:spAutoFit/>
-          </a:bodyPr>
-          <a:lstStyle/>
-          <a:p>
-            <a:pPr>
-              <a:defRPr sz="1100">
-                <a:solidFill>
-                  <a:srgbClr val="5A605C"/>
-                </a:solidFill>
-              </a:defRPr>
-            </a:pPr>
-            <a:r>
-              <a:t>50</a:t>
-            </a:r>
-          </a:p>
-        </p:txBody>
-      </p:sp>
-      <p:sp>
-        <p:nvSpPr>
-          <p:cNvPr id="4" name="TextBox 3"/>
-          <p:cNvSpPr txBox="1"/>
-          <p:nvPr/>
-        </p:nvSpPr>
-        <p:spPr>
-          <a:xfrm>
-            <a:off x="502920" y="1234440"/>
-            <a:ext cx="11155680" cy="5303520"/>
-          </a:xfrm>
-          <a:prstGeom prst="rect">
-            <a:avLst/>
-          </a:prstGeom>
-          <a:noFill/>
-        </p:spPr>
-        <p:txBody>
-          <a:bodyPr wrap="square">
-            <a:spAutoFit/>
-          </a:bodyPr>
-          <a:lstStyle/>
-          <a:p>
-            <a:endParaRPr/>
-          </a:p>
-        </p:txBody>
-      </p:sp>
-    </p:spTree>
-  </p:cSld>
-  <p:clrMapOvr>
-    <a:masterClrMapping/>
-  </p:clrMapOvr>
-</p:sld>
-</file>
-
-<file path=ppt/slides/slide46.xml><?xml version="1.0" encoding="utf-8"?>
-<p:sld xmlns:a="http://schemas.openxmlformats.org/drawingml/2006/main" xmlns:p="http://schemas.openxmlformats.org/presentationml/2006/main" xmlns:r="http://schemas.openxmlformats.org/officeDocument/2006/relationships">
-  <p:cSld>
-    <p:spTree>
-      <p:nvGrpSpPr>
-        <p:cNvPr id="1" name=""/>
-        <p:cNvGrpSpPr/>
-        <p:nvPr/>
-      </p:nvGrpSpPr>
-      <p:grpSpPr/>
-      <p:sp>
-        <p:nvSpPr>
-          <p:cNvPr id="2" name="Rectangle 1"/>
-          <p:cNvSpPr/>
-          <p:nvPr/>
-        </p:nvSpPr>
-        <p:spPr>
-          <a:xfrm>
-            <a:off x="0" y="0"/>
-            <a:ext cx="12192000" cy="960120"/>
-          </a:xfrm>
-          <a:prstGeom prst="rect">
-            <a:avLst/>
-          </a:prstGeom>
-          <a:solidFill>
-            <a:srgbClr val="1F3A4D"/>
-          </a:solidFill>
-          <a:ln>
-            <a:noFill/>
-          </a:ln>
-        </p:spPr>
-        <p:style>
-          <a:lnRef idx="1">
-            <a:schemeClr val="accent1"/>
-          </a:lnRef>
-          <a:fillRef idx="3">
-            <a:schemeClr val="accent1"/>
-          </a:fillRef>
-          <a:effectRef idx="2">
-            <a:schemeClr val="accent1"/>
-          </a:effectRef>
-          <a:fontRef idx="minor">
-            <a:schemeClr val="lt1"/>
-          </a:fontRef>
-        </p:style>
-        <p:txBody>
-          <a:bodyPr rtlCol="0" anchor="ctr" lIns="365760" tIns="73152" wrap="square"/>
-          <a:lstStyle/>
-          <a:p>
-            <a:pPr algn="ctr">
-              <a:defRPr sz="2600" b="1">
-                <a:solidFill>
-                  <a:srgbClr val="FFFFFF"/>
-                </a:solidFill>
-              </a:defRPr>
-            </a:pPr>
-            <a:r>
-              <a:t>One More Lead: Could the Other Side's Own Storage Explain the Gap?</a:t>
-            </a:r>
-          </a:p>
-          <a:p>
-            <a:pPr>
-              <a:defRPr sz="1400">
-                <a:solidFill>
-                  <a:srgbClr val="C8D2DA"/>
-                </a:solidFill>
-              </a:defRPr>
-            </a:pPr>
-            <a:r>
-              <a:t>A real, testable idea - checked and ruled out</a:t>
-            </a:r>
-          </a:p>
-        </p:txBody>
-      </p:sp>
-      <p:sp>
-        <p:nvSpPr>
-          <p:cNvPr id="3" name="TextBox 2"/>
-          <p:cNvSpPr txBox="1"/>
-          <p:nvPr/>
-        </p:nvSpPr>
-        <p:spPr>
-          <a:xfrm>
-            <a:off x="11551920" y="6446520"/>
-            <a:ext cx="457200" cy="320040"/>
-          </a:xfrm>
-          <a:prstGeom prst="rect">
-            <a:avLst/>
-          </a:prstGeom>
-          <a:noFill/>
-        </p:spPr>
-        <p:txBody>
-          <a:bodyPr wrap="none">
-            <a:spAutoFit/>
-          </a:bodyPr>
-          <a:lstStyle/>
-          <a:p>
-            <a:pPr>
-              <a:defRPr sz="1100">
-                <a:solidFill>
-                  <a:srgbClr val="5A605C"/>
-                </a:solidFill>
-              </a:defRPr>
-            </a:pPr>
-            <a:r>
-              <a:t>42</a:t>
-            </a:r>
-          </a:p>
-        </p:txBody>
-      </p:sp>
-      <p:sp>
-        <p:nvSpPr>
-          <p:cNvPr id="4" name="TextBox 3"/>
-          <p:cNvSpPr txBox="1"/>
-          <p:nvPr/>
-        </p:nvSpPr>
-        <p:spPr>
-          <a:xfrm>
-            <a:off x="502920" y="1234440"/>
-            <a:ext cx="11155680" cy="5303520"/>
-          </a:xfrm>
-          <a:prstGeom prst="rect">
-            <a:avLst/>
-          </a:prstGeom>
-          <a:noFill/>
-        </p:spPr>
-        <p:txBody>
-          <a:bodyPr wrap="square">
-            <a:spAutoFit/>
-          </a:bodyPr>
-          <a:lstStyle/>
-          <a:p>
-            <a:pPr>
-              <a:spcAft>
-                <a:spcPts val="1000"/>
-              </a:spcAft>
-              <a:defRPr sz="1800" b="1">
-                <a:solidFill>
-                  <a:srgbClr val="1E2220"/>
-                </a:solidFill>
-              </a:defRPr>
-            </a:pPr>
-            <a:r>
-              <a:t>•  The one open thread from before: a small number of extreme hours where Germany imports less than it could, even with spare capacity available</a:t>
-            </a:r>
-          </a:p>
-          <a:p>
-            <a:pPr>
-              <a:spcAft>
-                <a:spcPts val="1000"/>
-              </a:spcAft>
-              <a:defRPr sz="1800" b="1">
-                <a:solidFill>
-                  <a:srgbClr val="1E2220"/>
-                </a:solidFill>
-              </a:defRPr>
-            </a:pPr>
-            <a:r>
-              <a:t>•  Tested directly using data already on hand: is the rest of Europe's own storage running physically empty during those hours?</a:t>
-            </a:r>
-          </a:p>
-          <a:p>
-            <a:pPr>
-              <a:spcAft>
-                <a:spcPts val="1000"/>
-              </a:spcAft>
-              <a:defRPr sz="1800" b="1">
-                <a:solidFill>
-                  <a:srgbClr val="1E2220"/>
-                </a:solidFill>
-              </a:defRPr>
-            </a:pPr>
-            <a:r>
-              <a:t>•  Checked both battery-style storage and reservoir hydro on the other side of the border - neither ever comes close to its own physical limit, in either year tested</a:t>
-            </a:r>
-          </a:p>
-          <a:p>
-            <a:pPr>
-              <a:spcAft>
-                <a:spcPts val="1000"/>
-              </a:spcAft>
-              <a:defRPr sz="1800" b="1">
-                <a:solidFill>
-                  <a:srgbClr val="1E2220"/>
-                </a:solidFill>
-              </a:defRPr>
-            </a:pPr>
-            <a:r>
-              <a:t>•  Rules out 'the other side simply has nothing left to give' - strengthens the case that the real limiter is inside the model's own internal trading logic, not a real-world capacity constraint anywhere</a:t>
-            </a:r>
-          </a:p>
-        </p:txBody>
-      </p:sp>
-    </p:spTree>
-  </p:cSld>
-  <p:clrMapOvr>
-    <a:masterClrMapping/>
-  </p:clrMapOvr>
-</p:sld>
-</file>
-
-<file path=ppt/slides/slide47.xml><?xml version="1.0" encoding="utf-8"?>
-<p:sld xmlns:a="http://schemas.openxmlformats.org/drawingml/2006/main" xmlns:p="http://schemas.openxmlformats.org/presentationml/2006/main" xmlns:r="http://schemas.openxmlformats.org/officeDocument/2006/relationships">
-  <p:cSld>
-    <p:spTree>
-      <p:nvGrpSpPr>
-        <p:cNvPr id="1" name=""/>
-        <p:cNvGrpSpPr/>
-        <p:nvPr/>
-      </p:nvGrpSpPr>
-      <p:grpSpPr/>
-      <p:sp>
-        <p:nvSpPr>
-          <p:cNvPr id="2" name="Rectangle 1"/>
-          <p:cNvSpPr/>
-          <p:nvPr/>
-        </p:nvSpPr>
-        <p:spPr>
-          <a:xfrm>
-            <a:off x="0" y="0"/>
-            <a:ext cx="12192000" cy="960120"/>
-          </a:xfrm>
-          <a:prstGeom prst="rect">
-            <a:avLst/>
-          </a:prstGeom>
-          <a:solidFill>
-            <a:srgbClr val="1F3A4D"/>
-          </a:solidFill>
-          <a:ln>
-            <a:noFill/>
-          </a:ln>
-        </p:spPr>
-        <p:style>
-          <a:lnRef idx="1">
-            <a:schemeClr val="accent1"/>
-          </a:lnRef>
-          <a:fillRef idx="3">
-            <a:schemeClr val="accent1"/>
-          </a:fillRef>
-          <a:effectRef idx="2">
-            <a:schemeClr val="accent1"/>
-          </a:effectRef>
-          <a:fontRef idx="minor">
-            <a:schemeClr val="lt1"/>
-          </a:fontRef>
-        </p:style>
-        <p:txBody>
-          <a:bodyPr rtlCol="0" anchor="ctr" lIns="365760" tIns="73152" wrap="square"/>
-          <a:lstStyle/>
-          <a:p>
-            <a:pPr algn="ctr">
-              <a:defRPr sz="2600" b="1">
-                <a:solidFill>
-                  <a:srgbClr val="FFFFFF"/>
-                </a:solidFill>
-              </a:defRPr>
-            </a:pPr>
-            <a:r>
-              <a:t>Pushing Further: Replacing the Combined Zone With a Real Named Country</a:t>
-            </a:r>
-          </a:p>
-          <a:p>
-            <a:pPr>
-              <a:defRPr sz="1400">
-                <a:solidFill>
-                  <a:srgbClr val="C8D2DA"/>
-                </a:solidFill>
-              </a:defRPr>
-            </a:pPr>
-            <a:r>
-              <a:t>Testing whether more realism helps, or whether the combined approach was already the right call</a:t>
-            </a:r>
-          </a:p>
-        </p:txBody>
-      </p:sp>
-      <p:sp>
-        <p:nvSpPr>
-          <p:cNvPr id="3" name="TextBox 2"/>
-          <p:cNvSpPr txBox="1"/>
-          <p:nvPr/>
-        </p:nvSpPr>
-        <p:spPr>
-          <a:xfrm>
-            <a:off x="11551920" y="6446520"/>
-            <a:ext cx="457200" cy="320040"/>
-          </a:xfrm>
-          <a:prstGeom prst="rect">
-            <a:avLst/>
-          </a:prstGeom>
-          <a:noFill/>
-        </p:spPr>
-        <p:txBody>
-          <a:bodyPr wrap="none">
-            <a:spAutoFit/>
-          </a:bodyPr>
-          <a:lstStyle/>
-          <a:p>
-            <a:pPr>
-              <a:defRPr sz="1100">
-                <a:solidFill>
-                  <a:srgbClr val="5A605C"/>
-                </a:solidFill>
-              </a:defRPr>
-            </a:pPr>
-            <a:r>
-              <a:t>43</a:t>
-            </a:r>
-          </a:p>
-        </p:txBody>
-      </p:sp>
-      <p:sp>
-        <p:nvSpPr>
-          <p:cNvPr id="4" name="TextBox 3"/>
-          <p:cNvSpPr txBox="1"/>
-          <p:nvPr/>
-        </p:nvSpPr>
-        <p:spPr>
-          <a:xfrm>
-            <a:off x="502920" y="1234440"/>
-            <a:ext cx="11155680" cy="5303520"/>
-          </a:xfrm>
-          <a:prstGeom prst="rect">
-            <a:avLst/>
-          </a:prstGeom>
-          <a:noFill/>
-        </p:spPr>
-        <p:txBody>
-          <a:bodyPr wrap="square">
-            <a:spAutoFit/>
-          </a:bodyPr>
-          <a:lstStyle/>
-          <a:p>
-            <a:pPr>
-              <a:spcAft>
-                <a:spcPts val="1000"/>
-              </a:spcAft>
-              <a:defRPr sz="1800" b="1">
-                <a:solidFill>
-                  <a:srgbClr val="1E2220"/>
-                </a:solidFill>
-              </a:defRPr>
-            </a:pPr>
-            <a:r>
-              <a:t>•  Everything so far treated 'the rest of Europe' as one combined stand-in - the next real question: does splitting out a real neighbour by name do any better?</a:t>
-            </a:r>
-          </a:p>
-          <a:p>
-            <a:pPr>
-              <a:spcAft>
-                <a:spcPts val="1000"/>
-              </a:spcAft>
-              <a:defRPr sz="1800" b="1">
-                <a:solidFill>
-                  <a:srgbClr val="1E2220"/>
-                </a:solidFill>
-              </a:defRPr>
-            </a:pPr>
-            <a:r>
-              <a:t>•  Chose France as the test case: the largest single economy involved, and the one country with enough real, already-sourced data to build immediately</a:t>
-            </a:r>
-          </a:p>
-          <a:p>
-            <a:pPr>
-              <a:spcAft>
-                <a:spcPts val="1000"/>
-              </a:spcAft>
-              <a:defRPr sz="1800" b="1">
-                <a:solidFill>
-                  <a:srgbClr val="1E2220"/>
-                </a:solidFill>
-              </a:defRPr>
-            </a:pPr>
-            <a:r>
-              <a:t>•  Built it properly: France's own real power plants, real demand, real weather-driven renewables, and a real border link to Germany - not a shortcut</a:t>
-            </a:r>
-          </a:p>
-        </p:txBody>
-      </p:sp>
-    </p:spTree>
-  </p:cSld>
-  <p:clrMapOvr>
-    <a:masterClrMapping/>
-  </p:clrMapOvr>
-</p:sld>
-</file>
-
-<file path=ppt/slides/slide48.xml><?xml version="1.0" encoding="utf-8"?>
-<p:sld xmlns:a="http://schemas.openxmlformats.org/drawingml/2006/main" xmlns:p="http://schemas.openxmlformats.org/presentationml/2006/main" xmlns:r="http://schemas.openxmlformats.org/officeDocument/2006/relationships">
-  <p:cSld>
-    <p:spTree>
-      <p:nvGrpSpPr>
-        <p:cNvPr id="1" name=""/>
-        <p:cNvGrpSpPr/>
-        <p:nvPr/>
-      </p:nvGrpSpPr>
-      <p:grpSpPr/>
-      <p:sp>
-        <p:nvSpPr>
-          <p:cNvPr id="2" name="Rectangle 1"/>
-          <p:cNvSpPr/>
-          <p:nvPr/>
-        </p:nvSpPr>
-        <p:spPr>
-          <a:xfrm>
-            <a:off x="0" y="0"/>
-            <a:ext cx="12192000" cy="960120"/>
-          </a:xfrm>
-          <a:prstGeom prst="rect">
-            <a:avLst/>
-          </a:prstGeom>
-          <a:solidFill>
-            <a:srgbClr val="1F3A4D"/>
-          </a:solidFill>
-          <a:ln>
-            <a:noFill/>
-          </a:ln>
-        </p:spPr>
-        <p:style>
-          <a:lnRef idx="1">
-            <a:schemeClr val="accent1"/>
-          </a:lnRef>
-          <a:fillRef idx="3">
-            <a:schemeClr val="accent1"/>
-          </a:fillRef>
-          <a:effectRef idx="2">
-            <a:schemeClr val="accent1"/>
-          </a:effectRef>
-          <a:fontRef idx="minor">
-            <a:schemeClr val="lt1"/>
-          </a:fontRef>
-        </p:style>
-        <p:txBody>
-          <a:bodyPr rtlCol="0" anchor="ctr" lIns="365760" tIns="73152" wrap="square"/>
-          <a:lstStyle/>
-          <a:p>
-            <a:pPr algn="ctr">
-              <a:defRPr sz="2600" b="1">
-                <a:solidFill>
-                  <a:srgbClr val="FFFFFF"/>
-                </a:solidFill>
-              </a:defRPr>
-            </a:pPr>
-            <a:r>
-              <a:t>Result: A Real Step Backward - With a Clear, Understood Reason</a:t>
-            </a:r>
-          </a:p>
-          <a:p>
-            <a:pPr>
-              <a:defRPr sz="1400">
-                <a:solidFill>
-                  <a:srgbClr val="C8D2DA"/>
-                </a:solidFill>
-              </a:defRPr>
-            </a:pPr>
-            <a:r>
-              <a:t>Splitting France out on its own made things worse, not better</a:t>
-            </a:r>
-          </a:p>
-        </p:txBody>
-      </p:sp>
-      <p:sp>
-        <p:nvSpPr>
-          <p:cNvPr id="3" name="TextBox 2"/>
-          <p:cNvSpPr txBox="1"/>
-          <p:nvPr/>
-        </p:nvSpPr>
-        <p:spPr>
-          <a:xfrm>
-            <a:off x="11551920" y="6446520"/>
-            <a:ext cx="457200" cy="320040"/>
-          </a:xfrm>
-          <a:prstGeom prst="rect">
-            <a:avLst/>
-          </a:prstGeom>
-          <a:noFill/>
-        </p:spPr>
-        <p:txBody>
-          <a:bodyPr wrap="none">
-            <a:spAutoFit/>
-          </a:bodyPr>
-          <a:lstStyle/>
-          <a:p>
-            <a:pPr>
-              <a:defRPr sz="1100">
-                <a:solidFill>
-                  <a:srgbClr val="5A605C"/>
-                </a:solidFill>
-              </a:defRPr>
-            </a:pPr>
-            <a:r>
-              <a:t>44</a:t>
-            </a:r>
-          </a:p>
-        </p:txBody>
-      </p:sp>
-      <p:graphicFrame>
-        <p:nvGraphicFramePr>
-          <p:cNvPr id="4" name="Table 3"/>
-          <p:cNvGraphicFramePr>
-            <a:graphicFrameLocks noGrp="1"/>
-          </p:cNvGraphicFramePr>
-          <p:nvPr/>
-        </p:nvGraphicFramePr>
-        <p:xfrm>
-          <a:off x="640080" y="1371600"/>
-          <a:ext cx="12252960" cy="1508760"/>
-        </p:xfrm>
-        <a:graphic>
-          <a:graphicData uri="http://schemas.openxmlformats.org/drawingml/2006/table">
-            <a:tbl>
-              <a:tblPr firstRow="1" bandRow="1">
-                <a:tableStyleId>{5C22544A-7EE6-4342-B048-85BDC9FD1C3A}</a:tableStyleId>
-              </a:tblPr>
-              <a:tblGrid>
-                <a:gridCol w="4937760"/>
-                <a:gridCol w="3657600"/>
-                <a:gridCol w="3657600"/>
-              </a:tblGrid>
-              <a:tr h="502920">
-                <a:tc>
-                  <a:txBody>
-                    <a:bodyPr/>
-                    <a:lstStyle/>
-                    <a:p>
-                      <a:pPr algn="ctr">
-                        <a:defRPr b="1" sz="1300">
-                          <a:solidFill>
-                            <a:srgbClr val="FFFFFF"/>
-                          </a:solidFill>
-                        </a:defRPr>
-                      </a:pPr>
-                    </a:p>
-                  </a:txBody>
-                  <a:tcPr>
-                    <a:solidFill>
-                      <a:srgbClr val="1F3A4D"/>
-                    </a:solidFill>
-                  </a:tcPr>
-                </a:tc>
-                <a:tc>
-                  <a:txBody>
-                    <a:bodyPr/>
-                    <a:lstStyle/>
-                    <a:p>
-                      <a:pPr algn="ctr">
-                        <a:defRPr b="1" sz="1300">
-                          <a:solidFill>
-                            <a:srgbClr val="FFFFFF"/>
-                          </a:solidFill>
-                        </a:defRPr>
-                      </a:pPr>
-                      <a:r>
-                        <a:t>Combined zone (best result)</a:t>
-                      </a:r>
-                    </a:p>
-                  </a:txBody>
-                  <a:tcPr>
-                    <a:solidFill>
-                      <a:srgbClr val="1F3A4D"/>
-                    </a:solidFill>
-                  </a:tcPr>
-                </a:tc>
-                <a:tc>
-                  <a:txBody>
-                    <a:bodyPr/>
-                    <a:lstStyle/>
-                    <a:p>
-                      <a:pPr algn="ctr">
-                        <a:defRPr b="1" sz="1300">
-                          <a:solidFill>
-                            <a:srgbClr val="FFFFFF"/>
-                          </a:solidFill>
-                        </a:defRPr>
-                      </a:pPr>
-                      <a:r>
-                        <a:t>France split out separately</a:t>
-                      </a:r>
-                    </a:p>
-                  </a:txBody>
-                  <a:tcPr>
-                    <a:solidFill>
-                      <a:srgbClr val="1F3A4D"/>
-                    </a:solidFill>
-                  </a:tcPr>
-                </a:tc>
-              </a:tr>
-              <a:tr h="502920">
-                <a:tc>
-                  <a:txBody>
-                    <a:bodyPr/>
-                    <a:lstStyle/>
-                    <a:p>
-                      <a:pPr algn="ctr">
-                        <a:defRPr sz="1200" b="1">
-                          <a:solidFill>
-                            <a:srgbClr val="1E2220"/>
-                          </a:solidFill>
-                        </a:defRPr>
-                      </a:pPr>
-                      <a:r>
-                        <a:t>'Ran out of power' hours</a:t>
-                      </a:r>
-                    </a:p>
-                  </a:txBody>
-                  <a:tcPr>
-                    <a:solidFill>
-                      <a:srgbClr val="FFFFFF"/>
-                    </a:solidFill>
-                  </a:tcPr>
-                </a:tc>
-                <a:tc>
-                  <a:txBody>
-                    <a:bodyPr/>
-                    <a:lstStyle/>
-                    <a:p>
-                      <a:pPr algn="ctr">
-                        <a:defRPr sz="1200" b="0">
-                          <a:solidFill>
-                            <a:srgbClr val="1E2220"/>
-                          </a:solidFill>
-                        </a:defRPr>
-                      </a:pPr>
-                      <a:r>
-                        <a:t>7</a:t>
-                      </a:r>
-                    </a:p>
-                  </a:txBody>
-                  <a:tcPr>
-                    <a:solidFill>
-                      <a:srgbClr val="FFFFFF"/>
-                    </a:solidFill>
-                  </a:tcPr>
-                </a:tc>
-                <a:tc>
-                  <a:txBody>
-                    <a:bodyPr/>
-                    <a:lstStyle/>
-                    <a:p>
-                      <a:pPr algn="ctr">
-                        <a:defRPr sz="1200" b="0">
-                          <a:solidFill>
-                            <a:srgbClr val="1E2220"/>
-                          </a:solidFill>
-                        </a:defRPr>
-                      </a:pPr>
-                      <a:r>
-                        <a:t>167</a:t>
-                      </a:r>
-                    </a:p>
-                  </a:txBody>
-                  <a:tcPr>
-                    <a:solidFill>
-                      <a:srgbClr val="FFFFFF"/>
-                    </a:solidFill>
-                  </a:tcPr>
-                </a:tc>
-              </a:tr>
-              <a:tr h="502920">
-                <a:tc>
-                  <a:txBody>
-                    <a:bodyPr/>
-                    <a:lstStyle/>
-                    <a:p>
-                      <a:pPr algn="ctr">
-                        <a:defRPr sz="1200" b="1">
-                          <a:solidFill>
-                            <a:srgbClr val="1E2220"/>
-                          </a:solidFill>
-                        </a:defRPr>
-                      </a:pPr>
-                      <a:r>
-                        <a:t>Average price gap on ordinary days</a:t>
-                      </a:r>
-                    </a:p>
-                  </a:txBody>
-                  <a:tcPr>
-                    <a:solidFill>
-                      <a:srgbClr val="EEF0E9"/>
-                    </a:solidFill>
-                  </a:tcPr>
-                </a:tc>
-                <a:tc>
-                  <a:txBody>
-                    <a:bodyPr/>
-                    <a:lstStyle/>
-                    <a:p>
-                      <a:pPr algn="ctr">
-                        <a:defRPr sz="1200" b="0">
-                          <a:solidFill>
-                            <a:srgbClr val="1E2220"/>
-                          </a:solidFill>
-                        </a:defRPr>
-                      </a:pPr>
-                      <a:r>
-                        <a:t>-2.90</a:t>
-                      </a:r>
-                    </a:p>
-                  </a:txBody>
-                  <a:tcPr>
-                    <a:solidFill>
-                      <a:srgbClr val="EEF0E9"/>
-                    </a:solidFill>
-                  </a:tcPr>
-                </a:tc>
-                <a:tc>
-                  <a:txBody>
-                    <a:bodyPr/>
-                    <a:lstStyle/>
-                    <a:p>
-                      <a:pPr algn="ctr">
-                        <a:defRPr sz="1200" b="0">
-                          <a:solidFill>
-                            <a:srgbClr val="1E2220"/>
-                          </a:solidFill>
-                        </a:defRPr>
-                      </a:pPr>
-                      <a:r>
-                        <a:t>+9.65</a:t>
-                      </a:r>
-                    </a:p>
-                  </a:txBody>
-                  <a:tcPr>
-                    <a:solidFill>
-                      <a:srgbClr val="EEF0E9"/>
-                    </a:solidFill>
-                  </a:tcPr>
-                </a:tc>
-              </a:tr>
-            </a:tbl>
-          </a:graphicData>
-        </a:graphic>
-      </p:graphicFrame>
-      <p:sp>
-        <p:nvSpPr>
-          <p:cNvPr id="5" name="TextBox 4"/>
-          <p:cNvSpPr txBox="1"/>
-          <p:nvPr/>
-        </p:nvSpPr>
-        <p:spPr>
-          <a:xfrm>
-            <a:off x="640080" y="3063240"/>
-            <a:ext cx="10881360" cy="1097280"/>
-          </a:xfrm>
-          <a:prstGeom prst="rect">
-            <a:avLst/>
-          </a:prstGeom>
-          <a:noFill/>
-        </p:spPr>
-        <p:txBody>
-          <a:bodyPr wrap="none">
-            <a:spAutoFit/>
-          </a:bodyPr>
-          <a:lstStyle/>
-          <a:p>
-            <a:pPr>
-              <a:defRPr sz="1300" i="1">
-                <a:solidFill>
-                  <a:srgbClr val="5A605C"/>
-                </a:solidFill>
-              </a:defRPr>
-            </a:pPr>
-            <a:r>
-              <a:t>Real, checked reason: France's own huge nuclear fleet used to help keep the WHOLE combined pool well-supplied. Pulled out on its own, the remaining combined zone lost that cushion and became genuinely short more often - while France's own surplus, now only linked directly to Germany by a narrow border, couldn't reach the rest of Europe to help there either.</a:t>
-            </a:r>
-          </a:p>
-        </p:txBody>
-      </p:sp>
-    </p:spTree>
-  </p:cSld>
-  <p:clrMapOvr>
-    <a:masterClrMapping/>
-  </p:clrMapOvr>
-</p:sld>
-</file>
-
-<file path=ppt/slides/slide49.xml><?xml version="1.0" encoding="utf-8"?>
-<p:sld xmlns:a="http://schemas.openxmlformats.org/drawingml/2006/main" xmlns:p="http://schemas.openxmlformats.org/presentationml/2006/main" xmlns:r="http://schemas.openxmlformats.org/officeDocument/2006/relationships">
-  <p:cSld>
-    <p:spTree>
-      <p:nvGrpSpPr>
-        <p:cNvPr id="1" name=""/>
-        <p:cNvGrpSpPr/>
-        <p:nvPr/>
-      </p:nvGrpSpPr>
-      <p:grpSpPr/>
-      <p:sp>
-        <p:nvSpPr>
-          <p:cNvPr id="2" name="Rectangle 1"/>
-          <p:cNvSpPr/>
-          <p:nvPr/>
-        </p:nvSpPr>
-        <p:spPr>
-          <a:xfrm>
-            <a:off x="0" y="0"/>
-            <a:ext cx="12192000" cy="960120"/>
-          </a:xfrm>
-          <a:prstGeom prst="rect">
-            <a:avLst/>
-          </a:prstGeom>
-          <a:solidFill>
-            <a:srgbClr val="1F3A4D"/>
-          </a:solidFill>
-          <a:ln>
-            <a:noFill/>
-          </a:ln>
-        </p:spPr>
-        <p:style>
-          <a:lnRef idx="1">
-            <a:schemeClr val="accent1"/>
-          </a:lnRef>
-          <a:fillRef idx="3">
-            <a:schemeClr val="accent1"/>
-          </a:fillRef>
-          <a:effectRef idx="2">
-            <a:schemeClr val="accent1"/>
-          </a:effectRef>
-          <a:fontRef idx="minor">
-            <a:schemeClr val="lt1"/>
-          </a:fontRef>
-        </p:style>
-        <p:txBody>
-          <a:bodyPr rtlCol="0" anchor="ctr" lIns="365760" tIns="73152" wrap="square"/>
-          <a:lstStyle/>
-          <a:p>
-            <a:pPr algn="ctr">
-              <a:defRPr sz="2600" b="1">
-                <a:solidFill>
-                  <a:srgbClr val="FFFFFF"/>
-                </a:solidFill>
-              </a:defRPr>
-            </a:pPr>
-            <a:r>
-              <a:t>Going All the Way: All 10 Real Neighbouring Countries at Once</a:t>
-            </a:r>
-          </a:p>
-          <a:p>
-            <a:pPr>
-              <a:defRPr sz="1400">
-                <a:solidFill>
-                  <a:srgbClr val="C8D2DA"/>
-                </a:solidFill>
-              </a:defRPr>
-            </a:pPr>
-            <a:r>
-              <a:t>A genuine engineering problem, found, diagnosed, and fixed along the way</a:t>
-            </a:r>
-          </a:p>
-        </p:txBody>
-      </p:sp>
-      <p:sp>
-        <p:nvSpPr>
-          <p:cNvPr id="3" name="TextBox 2"/>
-          <p:cNvSpPr txBox="1"/>
-          <p:nvPr/>
-        </p:nvSpPr>
-        <p:spPr>
-          <a:xfrm>
-            <a:off x="11551920" y="6446520"/>
-            <a:ext cx="457200" cy="320040"/>
-          </a:xfrm>
-          <a:prstGeom prst="rect">
-            <a:avLst/>
-          </a:prstGeom>
-          <a:noFill/>
-        </p:spPr>
-        <p:txBody>
-          <a:bodyPr wrap="none">
-            <a:spAutoFit/>
-          </a:bodyPr>
-          <a:lstStyle/>
-          <a:p>
-            <a:pPr>
-              <a:defRPr sz="1100">
-                <a:solidFill>
-                  <a:srgbClr val="5A605C"/>
-                </a:solidFill>
-              </a:defRPr>
-            </a:pPr>
-            <a:r>
-              <a:t>45</a:t>
-            </a:r>
-          </a:p>
-        </p:txBody>
-      </p:sp>
-      <p:sp>
-        <p:nvSpPr>
-          <p:cNvPr id="4" name="TextBox 3"/>
-          <p:cNvSpPr txBox="1"/>
-          <p:nvPr/>
-        </p:nvSpPr>
-        <p:spPr>
-          <a:xfrm>
-            <a:off x="502920" y="1234440"/>
-            <a:ext cx="11155680" cy="5303520"/>
-          </a:xfrm>
-          <a:prstGeom prst="rect">
-            <a:avLst/>
-          </a:prstGeom>
-          <a:noFill/>
-        </p:spPr>
-        <p:txBody>
-          <a:bodyPr wrap="square">
-            <a:spAutoFit/>
-          </a:bodyPr>
-          <a:lstStyle/>
-          <a:p>
-            <a:pPr>
-              <a:spcAft>
-                <a:spcPts val="1000"/>
-              </a:spcAft>
-              <a:defRPr sz="1800" b="1">
-                <a:solidFill>
-                  <a:srgbClr val="1E2220"/>
-                </a:solidFill>
-              </a:defRPr>
-            </a:pPr>
-            <a:r>
-              <a:t>•  Since one real country made things worse for a clear, understood reason, the natural next test: does the SAME problem get worse - or does something different happen - once every real neighbour is split out?</a:t>
-            </a:r>
-          </a:p>
-          <a:p>
-            <a:pPr>
-              <a:spcAft>
-                <a:spcPts val="1000"/>
-              </a:spcAft>
-              <a:defRPr sz="1800" b="1">
-                <a:solidFill>
-                  <a:srgbClr val="1E2220"/>
-                </a:solidFill>
-              </a:defRPr>
-            </a:pPr>
-            <a:r>
-              <a:t>•  Built all 10 real countries as their own separate zones - the largest build of the whole project</a:t>
-            </a:r>
-          </a:p>
-          <a:p>
-            <a:pPr>
-              <a:spcAft>
-                <a:spcPts val="1000"/>
-              </a:spcAft>
-              <a:defRPr sz="1800" b="1">
-                <a:solidFill>
-                  <a:srgbClr val="1E2220"/>
-                </a:solidFill>
-              </a:defRPr>
-            </a:pPr>
-            <a:r>
-              <a:t>•  Hit a genuine, hard technical bug along the way: the model's own dispatch engine broke down for one specific country (Denmark) - traced directly to Denmark's real hydro power being far too small in absolute terms for the model to handle reliably</a:t>
-            </a:r>
-          </a:p>
-          <a:p>
-            <a:pPr>
-              <a:spcAft>
-                <a:spcPts val="1000"/>
-              </a:spcAft>
-              <a:defRPr sz="1800" b="1">
-                <a:solidFill>
-                  <a:srgbClr val="1E2220"/>
-                </a:solidFill>
-              </a:defRPr>
-            </a:pPr>
-            <a:r>
-              <a:t>•  Fixed with a clearly labelled, honestly-flagged technical workaround (not real data) - confirmed the fix worked, then completed the full 10-country run</a:t>
             </a:r>
           </a:p>
         </p:txBody>
@@ -14593,7 +15008,7 @@
 </file>
 
 <file path=ppt/slides/slide50.xml><?xml version="1.0" encoding="utf-8"?>
-<p:sld xmlns:a="http://schemas.openxmlformats.org/drawingml/2006/main" xmlns:p="http://schemas.openxmlformats.org/presentationml/2006/main" xmlns:r="http://schemas.openxmlformats.org/officeDocument/2006/relationships">
+<p:sld xmlns:a="http://schemas.openxmlformats.org/drawingml/2006/main" xmlns:r="http://schemas.openxmlformats.org/officeDocument/2006/relationships" xmlns:p="http://schemas.openxmlformats.org/presentationml/2006/main">
   <p:cSld>
     <p:spTree>
       <p:nvGrpSpPr>
@@ -14601,7 +15016,14 @@
         <p:cNvGrpSpPr/>
         <p:nvPr/>
       </p:nvGrpSpPr>
-      <p:grpSpPr/>
+      <p:grpSpPr>
+        <a:xfrm>
+          <a:off x="0" y="0"/>
+          <a:ext cx="0" cy="0"/>
+          <a:chOff x="0" y="0"/>
+          <a:chExt cx="0" cy="0"/>
+        </a:xfrm>
+      </p:grpSpPr>
       <p:sp>
         <p:nvSpPr>
           <p:cNvPr id="2" name="Rectangle 1"/>
@@ -14611,7 +15033,7 @@
         <p:spPr>
           <a:xfrm>
             <a:off x="0" y="0"/>
-            <a:ext cx="12192000" cy="960120"/>
+            <a:ext cx="12191695" cy="960120"/>
           </a:xfrm>
           <a:prstGeom prst="rect">
             <a:avLst/>
@@ -14638,30 +15060,18 @@
           </a:fontRef>
         </p:style>
         <p:txBody>
-          <a:bodyPr rtlCol="0" anchor="ctr" lIns="365760" tIns="73152" wrap="square"/>
+          <a:bodyPr wrap="square" lIns="365760" tIns="73152" rtlCol="0" anchor="ctr"/>
           <a:lstStyle/>
           <a:p>
             <a:pPr algn="ctr">
-              <a:defRPr sz="2600" b="1">
+              <a:defRPr sz="2800" b="1">
                 <a:solidFill>
                   <a:srgbClr val="FFFFFF"/>
                 </a:solidFill>
               </a:defRPr>
             </a:pPr>
             <a:r>
-              <a:t>Result: Better Than Expected - But Still Not the Winning Approach</a:t>
-            </a:r>
-          </a:p>
-          <a:p>
-            <a:pPr>
-              <a:defRPr sz="1400">
-                <a:solidFill>
-                  <a:srgbClr val="C8D2DA"/>
-                </a:solidFill>
-              </a:defRPr>
-            </a:pPr>
-            <a:r>
-              <a:t>Splitting into all 10 real countries beat the single-country attempt on every measure but one</a:t>
+              <a:t>Questions &amp; Discussion</a:t>
             </a:r>
           </a:p>
         </p:txBody>
@@ -14674,7 +15084,7 @@
         </p:nvSpPr>
         <p:spPr>
           <a:xfrm>
-            <a:off x="11551920" y="6446520"/>
+            <a:off x="11551615" y="6446520"/>
             <a:ext cx="457200" cy="320040"/>
           </a:xfrm>
           <a:prstGeom prst="rect">
@@ -14696,422 +15106,21 @@
               </a:defRPr>
             </a:pPr>
             <a:r>
-              <a:t>46</a:t>
-            </a:r>
-          </a:p>
-        </p:txBody>
-      </p:sp>
-      <p:graphicFrame>
-        <p:nvGraphicFramePr>
-          <p:cNvPr id="4" name="Table 3"/>
-          <p:cNvGraphicFramePr>
-            <a:graphicFrameLocks noGrp="1"/>
-          </p:cNvGraphicFramePr>
-          <p:nvPr/>
-        </p:nvGraphicFramePr>
-        <p:xfrm>
-          <a:off x="640080" y="1371600"/>
-          <a:ext cx="14173200" cy="2011680"/>
-        </p:xfrm>
-        <a:graphic>
-          <a:graphicData uri="http://schemas.openxmlformats.org/drawingml/2006/table">
-            <a:tbl>
-              <a:tblPr firstRow="1" bandRow="1">
-                <a:tableStyleId>{5C22544A-7EE6-4342-B048-85BDC9FD1C3A}</a:tableStyleId>
-              </a:tblPr>
-              <a:tblGrid>
-                <a:gridCol w="4572000"/>
-                <a:gridCol w="3200400"/>
-                <a:gridCol w="3200400"/>
-                <a:gridCol w="3200400"/>
-              </a:tblGrid>
-              <a:tr h="502920">
-                <a:tc>
-                  <a:txBody>
-                    <a:bodyPr/>
-                    <a:lstStyle/>
-                    <a:p>
-                      <a:pPr algn="ctr">
-                        <a:defRPr b="1" sz="1300">
-                          <a:solidFill>
-                            <a:srgbClr val="FFFFFF"/>
-                          </a:solidFill>
-                        </a:defRPr>
-                      </a:pPr>
-                    </a:p>
-                  </a:txBody>
-                  <a:tcPr>
-                    <a:solidFill>
-                      <a:srgbClr val="1F3A4D"/>
-                    </a:solidFill>
-                  </a:tcPr>
-                </a:tc>
-                <a:tc>
-                  <a:txBody>
-                    <a:bodyPr/>
-                    <a:lstStyle/>
-                    <a:p>
-                      <a:pPr algn="ctr">
-                        <a:defRPr b="1" sz="1300">
-                          <a:solidFill>
-                            <a:srgbClr val="FFFFFF"/>
-                          </a:solidFill>
-                        </a:defRPr>
-                      </a:pPr>
-                      <a:r>
-                        <a:t>Combined zone (best)</a:t>
-                      </a:r>
-                    </a:p>
-                  </a:txBody>
-                  <a:tcPr>
-                    <a:solidFill>
-                      <a:srgbClr val="1F3A4D"/>
-                    </a:solidFill>
-                  </a:tcPr>
-                </a:tc>
-                <a:tc>
-                  <a:txBody>
-                    <a:bodyPr/>
-                    <a:lstStyle/>
-                    <a:p>
-                      <a:pPr algn="ctr">
-                        <a:defRPr b="1" sz="1300">
-                          <a:solidFill>
-                            <a:srgbClr val="FFFFFF"/>
-                          </a:solidFill>
-                        </a:defRPr>
-                      </a:pPr>
-                      <a:r>
-                        <a:t>France alone</a:t>
-                      </a:r>
-                    </a:p>
-                  </a:txBody>
-                  <a:tcPr>
-                    <a:solidFill>
-                      <a:srgbClr val="1F3A4D"/>
-                    </a:solidFill>
-                  </a:tcPr>
-                </a:tc>
-                <a:tc>
-                  <a:txBody>
-                    <a:bodyPr/>
-                    <a:lstStyle/>
-                    <a:p>
-                      <a:pPr algn="ctr">
-                        <a:defRPr b="1" sz="1300">
-                          <a:solidFill>
-                            <a:srgbClr val="FFFFFF"/>
-                          </a:solidFill>
-                        </a:defRPr>
-                      </a:pPr>
-                      <a:r>
-                        <a:t>All 10 countries</a:t>
-                      </a:r>
-                    </a:p>
-                  </a:txBody>
-                  <a:tcPr>
-                    <a:solidFill>
-                      <a:srgbClr val="1F3A4D"/>
-                    </a:solidFill>
-                  </a:tcPr>
-                </a:tc>
-              </a:tr>
-              <a:tr h="502920">
-                <a:tc>
-                  <a:txBody>
-                    <a:bodyPr/>
-                    <a:lstStyle/>
-                    <a:p>
-                      <a:pPr algn="ctr">
-                        <a:defRPr sz="1200" b="1">
-                          <a:solidFill>
-                            <a:srgbClr val="1E2220"/>
-                          </a:solidFill>
-                        </a:defRPr>
-                      </a:pPr>
-                      <a:r>
-                        <a:t>'Ran out of power' hours</a:t>
-                      </a:r>
-                    </a:p>
-                  </a:txBody>
-                  <a:tcPr>
-                    <a:solidFill>
-                      <a:srgbClr val="FFFFFF"/>
-                    </a:solidFill>
-                  </a:tcPr>
-                </a:tc>
-                <a:tc>
-                  <a:txBody>
-                    <a:bodyPr/>
-                    <a:lstStyle/>
-                    <a:p>
-                      <a:pPr algn="ctr">
-                        <a:defRPr sz="1200" b="0">
-                          <a:solidFill>
-                            <a:srgbClr val="1E2220"/>
-                          </a:solidFill>
-                        </a:defRPr>
-                      </a:pPr>
-                      <a:r>
-                        <a:t>7</a:t>
-                      </a:r>
-                    </a:p>
-                  </a:txBody>
-                  <a:tcPr>
-                    <a:solidFill>
-                      <a:srgbClr val="FFFFFF"/>
-                    </a:solidFill>
-                  </a:tcPr>
-                </a:tc>
-                <a:tc>
-                  <a:txBody>
-                    <a:bodyPr/>
-                    <a:lstStyle/>
-                    <a:p>
-                      <a:pPr algn="ctr">
-                        <a:defRPr sz="1200" b="0">
-                          <a:solidFill>
-                            <a:srgbClr val="1E2220"/>
-                          </a:solidFill>
-                        </a:defRPr>
-                      </a:pPr>
-                      <a:r>
-                        <a:t>167</a:t>
-                      </a:r>
-                    </a:p>
-                  </a:txBody>
-                  <a:tcPr>
-                    <a:solidFill>
-                      <a:srgbClr val="FFFFFF"/>
-                    </a:solidFill>
-                  </a:tcPr>
-                </a:tc>
-                <a:tc>
-                  <a:txBody>
-                    <a:bodyPr/>
-                    <a:lstStyle/>
-                    <a:p>
-                      <a:pPr algn="ctr">
-                        <a:defRPr sz="1200" b="0">
-                          <a:solidFill>
-                            <a:srgbClr val="1E2220"/>
-                          </a:solidFill>
-                        </a:defRPr>
-                      </a:pPr>
-                      <a:r>
-                        <a:t>120</a:t>
-                      </a:r>
-                    </a:p>
-                  </a:txBody>
-                  <a:tcPr>
-                    <a:solidFill>
-                      <a:srgbClr val="FFFFFF"/>
-                    </a:solidFill>
-                  </a:tcPr>
-                </a:tc>
-              </a:tr>
-              <a:tr h="502920">
-                <a:tc>
-                  <a:txBody>
-                    <a:bodyPr/>
-                    <a:lstStyle/>
-                    <a:p>
-                      <a:pPr algn="ctr">
-                        <a:defRPr sz="1200" b="1">
-                          <a:solidFill>
-                            <a:srgbClr val="1E2220"/>
-                          </a:solidFill>
-                        </a:defRPr>
-                      </a:pPr>
-                      <a:r>
-                        <a:t>Average price gap, ordinary days</a:t>
-                      </a:r>
-                    </a:p>
-                  </a:txBody>
-                  <a:tcPr>
-                    <a:solidFill>
-                      <a:srgbClr val="EEF0E9"/>
-                    </a:solidFill>
-                  </a:tcPr>
-                </a:tc>
-                <a:tc>
-                  <a:txBody>
-                    <a:bodyPr/>
-                    <a:lstStyle/>
-                    <a:p>
-                      <a:pPr algn="ctr">
-                        <a:defRPr sz="1200" b="0">
-                          <a:solidFill>
-                            <a:srgbClr val="1E2220"/>
-                          </a:solidFill>
-                        </a:defRPr>
-                      </a:pPr>
-                      <a:r>
-                        <a:t>-2.90</a:t>
-                      </a:r>
-                    </a:p>
-                  </a:txBody>
-                  <a:tcPr>
-                    <a:solidFill>
-                      <a:srgbClr val="EEF0E9"/>
-                    </a:solidFill>
-                  </a:tcPr>
-                </a:tc>
-                <a:tc>
-                  <a:txBody>
-                    <a:bodyPr/>
-                    <a:lstStyle/>
-                    <a:p>
-                      <a:pPr algn="ctr">
-                        <a:defRPr sz="1200" b="0">
-                          <a:solidFill>
-                            <a:srgbClr val="1E2220"/>
-                          </a:solidFill>
-                        </a:defRPr>
-                      </a:pPr>
-                      <a:r>
-                        <a:t>+9.65</a:t>
-                      </a:r>
-                    </a:p>
-                  </a:txBody>
-                  <a:tcPr>
-                    <a:solidFill>
-                      <a:srgbClr val="EEF0E9"/>
-                    </a:solidFill>
-                  </a:tcPr>
-                </a:tc>
-                <a:tc>
-                  <a:txBody>
-                    <a:bodyPr/>
-                    <a:lstStyle/>
-                    <a:p>
-                      <a:pPr algn="ctr">
-                        <a:defRPr sz="1200" b="0">
-                          <a:solidFill>
-                            <a:srgbClr val="1E2220"/>
-                          </a:solidFill>
-                        </a:defRPr>
-                      </a:pPr>
-                      <a:r>
-                        <a:t>+4.87</a:t>
-                      </a:r>
-                    </a:p>
-                  </a:txBody>
-                  <a:tcPr>
-                    <a:solidFill>
-                      <a:srgbClr val="EEF0E9"/>
-                    </a:solidFill>
-                  </a:tcPr>
-                </a:tc>
-              </a:tr>
-              <a:tr h="502920">
-                <a:tc>
-                  <a:txBody>
-                    <a:bodyPr/>
-                    <a:lstStyle/>
-                    <a:p>
-                      <a:pPr algn="ctr">
-                        <a:defRPr sz="1200" b="1">
-                          <a:solidFill>
-                            <a:srgbClr val="1E2220"/>
-                          </a:solidFill>
-                        </a:defRPr>
-                      </a:pPr>
-                      <a:r>
-                        <a:t>Match quality (trustworthiness)</a:t>
-                      </a:r>
-                    </a:p>
-                  </a:txBody>
-                  <a:tcPr>
-                    <a:solidFill>
-                      <a:srgbClr val="FFFFFF"/>
-                    </a:solidFill>
-                  </a:tcPr>
-                </a:tc>
-                <a:tc>
-                  <a:txBody>
-                    <a:bodyPr/>
-                    <a:lstStyle/>
-                    <a:p>
-                      <a:pPr algn="ctr">
-                        <a:defRPr sz="1200" b="0">
-                          <a:solidFill>
-                            <a:srgbClr val="1E2220"/>
-                          </a:solidFill>
-                        </a:defRPr>
-                      </a:pPr>
-                      <a:r>
-                        <a:t>0.717</a:t>
-                      </a:r>
-                    </a:p>
-                  </a:txBody>
-                  <a:tcPr>
-                    <a:solidFill>
-                      <a:srgbClr val="FFFFFF"/>
-                    </a:solidFill>
-                  </a:tcPr>
-                </a:tc>
-                <a:tc>
-                  <a:txBody>
-                    <a:bodyPr/>
-                    <a:lstStyle/>
-                    <a:p>
-                      <a:pPr algn="ctr">
-                        <a:defRPr sz="1200" b="0">
-                          <a:solidFill>
-                            <a:srgbClr val="1E2220"/>
-                          </a:solidFill>
-                        </a:defRPr>
-                      </a:pPr>
-                      <a:r>
-                        <a:t>0.716</a:t>
-                      </a:r>
-                    </a:p>
-                  </a:txBody>
-                  <a:tcPr>
-                    <a:solidFill>
-                      <a:srgbClr val="FFFFFF"/>
-                    </a:solidFill>
-                  </a:tcPr>
-                </a:tc>
-                <a:tc>
-                  <a:txBody>
-                    <a:bodyPr/>
-                    <a:lstStyle/>
-                    <a:p>
-                      <a:pPr algn="ctr">
-                        <a:defRPr sz="1200" b="0">
-                          <a:solidFill>
-                            <a:srgbClr val="1E2220"/>
-                          </a:solidFill>
-                        </a:defRPr>
-                      </a:pPr>
-                      <a:r>
-                        <a:t>0.731 (best yet)</a:t>
-                      </a:r>
-                    </a:p>
-                  </a:txBody>
-                  <a:tcPr>
-                    <a:solidFill>
-                      <a:srgbClr val="FFFFFF"/>
-                    </a:solidFill>
-                  </a:tcPr>
-                </a:tc>
-              </a:tr>
-            </a:tbl>
-          </a:graphicData>
-        </a:graphic>
-      </p:graphicFrame>
-      <p:sp>
-        <p:nvSpPr>
-          <p:cNvPr id="5" name="TextBox 4"/>
+              <a:t>50</a:t>
+            </a:r>
+          </a:p>
+        </p:txBody>
+      </p:sp>
+      <p:sp>
+        <p:nvSpPr>
+          <p:cNvPr id="4" name="TextBox 3"/>
           <p:cNvSpPr txBox="1"/>
           <p:nvPr/>
         </p:nvSpPr>
         <p:spPr>
           <a:xfrm>
-            <a:off x="640080" y="3566160"/>
-            <a:ext cx="10881360" cy="1097280"/>
+            <a:off x="502920" y="1234440"/>
+            <a:ext cx="11155680" cy="5303520"/>
           </a:xfrm>
           <a:prstGeom prst="rect">
             <a:avLst/>
@@ -15119,21 +15128,12 @@
           <a:noFill/>
         </p:spPr>
         <p:txBody>
-          <a:bodyPr wrap="none">
+          <a:bodyPr wrap="square">
             <a:spAutoFit/>
           </a:bodyPr>
           <a:lstStyle/>
           <a:p>
-            <a:pPr>
-              <a:defRPr sz="1300" i="1">
-                <a:solidFill>
-                  <a:srgbClr val="5A605C"/>
-                </a:solidFill>
-              </a:defRPr>
-            </a:pPr>
-            <a:r>
-              <a:t>Genuinely surprising: going all the way to 10 real countries actually did BETTER than splitting out just one - likely because Germany can now draw on many countries' cheap power at once, instead of being stuck behind one narrow link. But it still doesn't beat the original combined-zone approach on the two measures that matter most. Decision: keep the combined zone as our best, standing result.</a:t>
-            </a:r>
+            <a:endParaRPr/>
           </a:p>
         </p:txBody>
       </p:sp>
@@ -15290,7 +15290,7 @@
           <a:noFill/>
         </p:spPr>
         <p:txBody>
-          <a:bodyPr wrap="none">
+          <a:bodyPr wrap="square">
             <a:spAutoFit/>
           </a:bodyPr>
           <a:lstStyle/>
@@ -15680,7 +15680,7 @@
           <a:noFill/>
         </p:spPr>
         <p:txBody>
-          <a:bodyPr wrap="none">
+          <a:bodyPr wrap="square">
             <a:spAutoFit/>
           </a:bodyPr>
           <a:lstStyle/>
